--- a/Reckon-Pitch-Deck.pptx
+++ b/Reckon-Pitch-Deck.pptx
@@ -4,6 +4,9 @@
   <p:sldMasterIdLst>
     <p:sldMasterId id="2147483648" r:id="rId1"/>
   </p:sldMasterIdLst>
+  <p:notesMasterIdLst>
+    <p:notesMasterId r:id="rId14"/>
+  </p:notesMasterIdLst>
   <p:sldIdLst>
     <p:sldId id="256" r:id="rId2"/>
     <p:sldId id="257" r:id="rId3"/>
@@ -18,10 +21,7 @@
     <p:sldId id="266" r:id="rId12"/>
     <p:sldId id="267" r:id="rId13"/>
   </p:sldIdLst>
-  <p:notesMasterIdLst>
-    <p:notesMasterId r:id="rId14"/>
-  </p:notesMasterIdLst>
-  <p:sldSz cx="9144000" cy="5143500"/>
+  <p:sldSz cx="9144000" cy="5143500" type="screen16x9"/>
   <p:notesSz cx="5143500" cy="9144000"/>
   <p:defaultTextStyle>
     <a:lvl1pPr marL="0" algn="l" defTabSz="914400" rtl="0" eaLnBrk="1" latinLnBrk="0" hangingPunct="1">
@@ -115,6 +115,11 @@
       </a:defRPr>
     </a:lvl9pPr>
   </p:defaultTextStyle>
+  <p:extLst>
+    <p:ext uri="{EFAFB233-063F-42B5-8137-9DF3F51BA10A}">
+      <p15:sldGuideLst xmlns:p15="http://schemas.microsoft.com/office/powerpoint/2012/main"/>
+    </p:ext>
+  </p:extLst>
 </p:presentation>
 </file>
 
@@ -140,234 +145,10 @@
           <a:chExt cx="0" cy="0"/>
         </a:xfrm>
       </p:grpSpPr>
-      <p:sp>
-        <p:nvSpPr>
-          <p:cNvPr id="2" name="Header Placeholder 1"/>
-          <p:cNvSpPr>
-            <a:spLocks noGrp="1"/>
-          </p:cNvSpPr>
-          <p:nvPr>
-            <p:ph type="hdr" sz="quarter"/>
-          </p:nvPr>
-        </p:nvSpPr>
-        <p:spPr>
-          <a:xfrm>
-            <a:off x="0" y="0"/>
-            <a:ext cx="2971800" cy="458788"/>
-          </a:xfrm>
-          <a:prstGeom prst="rect">
-            <a:avLst/>
-          </a:prstGeom>
-        </p:spPr>
-        <p:txBody>
-          <a:bodyPr vert="horz" lIns="91440" tIns="45720" rIns="91440" bIns="45720" rtlCol="0"/>
-          <a:lstStyle>
-            <a:lvl1pPr algn="l">
-              <a:defRPr sz="1200"/>
-            </a:lvl1pPr>
-          </a:lstStyle>
-          <a:p>
-            <a:endParaRPr lang="en-US"/>
-          </a:p>
-        </p:txBody>
-      </p:sp>
-      <p:sp>
-        <p:nvSpPr>
-          <p:cNvPr id="3" name="Date Placeholder 2"/>
-          <p:cNvSpPr>
-            <a:spLocks noGrp="1"/>
-          </p:cNvSpPr>
-          <p:nvPr>
-            <p:ph type="dt" idx="1"/>
-          </p:nvPr>
-        </p:nvSpPr>
-        <p:spPr>
-          <a:xfrm>
-            <a:off x="3884613" y="0"/>
-            <a:ext cx="2971800" cy="458788"/>
-          </a:xfrm>
-          <a:prstGeom prst="rect">
-            <a:avLst/>
-          </a:prstGeom>
-        </p:spPr>
-        <p:txBody>
-          <a:bodyPr vert="horz" lIns="91440" tIns="45720" rIns="91440" bIns="45720" rtlCol="0"/>
-          <a:lstStyle>
-            <a:lvl1pPr algn="r">
-              <a:defRPr sz="1200"/>
-            </a:lvl1pPr>
-          </a:lstStyle>
-          <a:p>
-            <a:fld id="{5282F153-3F37-0F45-9E97-73ACFA13230C}" type="datetimeFigureOut">
-              <a:rPr lang="en-US"/>
-              <a:t>7/23/19</a:t>
-            </a:fld>
-            <a:endParaRPr lang="en-US"/>
-          </a:p>
-        </p:txBody>
-      </p:sp>
-      <p:sp>
-        <p:nvSpPr>
-          <p:cNvPr id="4" name="Slide Image Placeholder 3"/>
-          <p:cNvSpPr>
-            <a:spLocks noGrp="1" noRot="1" noChangeAspect="1"/>
-          </p:cNvSpPr>
-          <p:nvPr>
-            <p:ph type="sldImg" idx="2"/>
-          </p:nvPr>
-        </p:nvSpPr>
-        <p:spPr>
-          <a:xfrm>
-            <a:off x="685800" y="1143000"/>
-            <a:ext cx="5486400" cy="3086100"/>
-          </a:xfrm>
-          <a:prstGeom prst="rect">
-            <a:avLst/>
-          </a:prstGeom>
-          <a:noFill/>
-          <a:ln w="12700">
-            <a:solidFill>
-              <a:prstClr val="black"/>
-            </a:solidFill>
-          </a:ln>
-        </p:spPr>
-        <p:txBody>
-          <a:bodyPr vert="horz" lIns="91440" tIns="45720" rIns="91440" bIns="45720" rtlCol="0" anchor="ctr"/>
-          <a:lstStyle/>
-          <a:p>
-            <a:endParaRPr lang="en-US"/>
-          </a:p>
-        </p:txBody>
-      </p:sp>
-      <p:sp>
-        <p:nvSpPr>
-          <p:cNvPr id="5" name="Notes Placeholder 4"/>
-          <p:cNvSpPr>
-            <a:spLocks noGrp="1"/>
-          </p:cNvSpPr>
-          <p:nvPr>
-            <p:ph type="body" sz="quarter" idx="3"/>
-          </p:nvPr>
-        </p:nvSpPr>
-        <p:spPr>
-          <a:xfrm>
-            <a:off x="685800" y="4400550"/>
-            <a:ext cx="5486400" cy="3600450"/>
-          </a:xfrm>
-          <a:prstGeom prst="rect">
-            <a:avLst/>
-          </a:prstGeom>
-        </p:spPr>
-        <p:txBody>
-          <a:bodyPr vert="horz" lIns="91440" tIns="45720" rIns="91440" bIns="45720" rtlCol="0"/>
-          <a:lstStyle/>
-          <a:p>
-            <a:pPr lvl="0"/>
-            <a:r>
-              <a:rPr lang="en-US"/>
-              <a:t>Click to edit Master text styles</a:t>
-            </a:r>
-          </a:p>
-          <a:p>
-            <a:pPr lvl="1"/>
-            <a:r>
-              <a:rPr lang="en-US"/>
-              <a:t>Second level</a:t>
-            </a:r>
-          </a:p>
-          <a:p>
-            <a:pPr lvl="2"/>
-            <a:r>
-              <a:rPr lang="en-US"/>
-              <a:t>Third level</a:t>
-            </a:r>
-          </a:p>
-          <a:p>
-            <a:pPr lvl="3"/>
-            <a:r>
-              <a:rPr lang="en-US"/>
-              <a:t>Fourth level</a:t>
-            </a:r>
-          </a:p>
-          <a:p>
-            <a:pPr lvl="4"/>
-            <a:r>
-              <a:rPr lang="en-US"/>
-              <a:t>Fifth level</a:t>
-            </a:r>
-          </a:p>
-        </p:txBody>
-      </p:sp>
-      <p:sp>
-        <p:nvSpPr>
-          <p:cNvPr id="6" name="Footer Placeholder 5"/>
-          <p:cNvSpPr>
-            <a:spLocks noGrp="1"/>
-          </p:cNvSpPr>
-          <p:nvPr>
-            <p:ph type="ftr" sz="quarter" idx="4"/>
-          </p:nvPr>
-        </p:nvSpPr>
-        <p:spPr>
-          <a:xfrm>
-            <a:off x="0" y="8685213"/>
-            <a:ext cx="2971800" cy="458787"/>
-          </a:xfrm>
-          <a:prstGeom prst="rect">
-            <a:avLst/>
-          </a:prstGeom>
-        </p:spPr>
-        <p:txBody>
-          <a:bodyPr vert="horz" lIns="91440" tIns="45720" rIns="91440" bIns="45720" rtlCol="0" anchor="b"/>
-          <a:lstStyle>
-            <a:lvl1pPr algn="l">
-              <a:defRPr sz="1200"/>
-            </a:lvl1pPr>
-          </a:lstStyle>
-          <a:p>
-            <a:endParaRPr lang="en-US"/>
-          </a:p>
-        </p:txBody>
-      </p:sp>
-      <p:sp>
-        <p:nvSpPr>
-          <p:cNvPr id="7" name="Slide Number Placeholder 6"/>
-          <p:cNvSpPr>
-            <a:spLocks noGrp="1"/>
-          </p:cNvSpPr>
-          <p:nvPr>
-            <p:ph type="sldNum" sz="quarter" idx="5"/>
-          </p:nvPr>
-        </p:nvSpPr>
-        <p:spPr>
-          <a:xfrm>
-            <a:off x="3884613" y="8685213"/>
-            <a:ext cx="2971800" cy="458787"/>
-          </a:xfrm>
-          <a:prstGeom prst="rect">
-            <a:avLst/>
-          </a:prstGeom>
-        </p:spPr>
-        <p:txBody>
-          <a:bodyPr vert="horz" lIns="91440" tIns="45720" rIns="91440" bIns="45720" rtlCol="0" anchor="b"/>
-          <a:lstStyle>
-            <a:lvl1pPr algn="r">
-              <a:defRPr sz="1200"/>
-            </a:lvl1pPr>
-          </a:lstStyle>
-          <a:p>
-            <a:fld id="{CE5E9CC1-C706-0F49-92D6-E571CC5EEA8F}" type="slidenum">
-              <a:rPr lang="en-US"/>
-              <a:t>‹#›</a:t>
-            </a:fld>
-            <a:endParaRPr lang="en-US"/>
-          </a:p>
-        </p:txBody>
-      </p:sp>
     </p:spTree>
     <p:extLst>
       <p:ext uri="{BB962C8B-B14F-4D97-AF65-F5344CB8AC3E}">
-        <p14:creationId xmlns:p14="http://schemas.microsoft.com/office/powerpoint/2010/main" val="1024086991"/>
+        <p14:creationId xmlns:p14="http://schemas.microsoft.com/office/powerpoint/2010/main" val="720045296"/>
       </p:ext>
     </p:extLst>
   </p:cSld>
@@ -511,10 +292,6 @@
           <a:bodyPr/>
           <a:lstStyle/>
           <a:p>
-            <a:r>
-              <a:rPr lang="en-US" dirty="0"/>
-              <a:t/>
-            </a:r>
             <a:endParaRPr lang="en-US" dirty="0"/>
           </a:p>
         </p:txBody>
@@ -599,10 +376,6 @@
           <a:bodyPr/>
           <a:lstStyle/>
           <a:p>
-            <a:r>
-              <a:rPr lang="en-US" dirty="0"/>
-              <a:t/>
-            </a:r>
             <a:endParaRPr lang="en-US" dirty="0"/>
           </a:p>
         </p:txBody>
@@ -687,10 +460,6 @@
           <a:bodyPr/>
           <a:lstStyle/>
           <a:p>
-            <a:r>
-              <a:rPr lang="en-US" dirty="0"/>
-              <a:t/>
-            </a:r>
             <a:endParaRPr lang="en-US" dirty="0"/>
           </a:p>
         </p:txBody>
@@ -775,10 +544,6 @@
           <a:bodyPr/>
           <a:lstStyle/>
           <a:p>
-            <a:r>
-              <a:rPr lang="en-US" dirty="0"/>
-              <a:t/>
-            </a:r>
             <a:endParaRPr lang="en-US" dirty="0"/>
           </a:p>
         </p:txBody>
@@ -863,10 +628,6 @@
           <a:bodyPr/>
           <a:lstStyle/>
           <a:p>
-            <a:r>
-              <a:rPr lang="en-US" dirty="0"/>
-              <a:t/>
-            </a:r>
             <a:endParaRPr lang="en-US" dirty="0"/>
           </a:p>
         </p:txBody>
@@ -951,10 +712,6 @@
           <a:bodyPr/>
           <a:lstStyle/>
           <a:p>
-            <a:r>
-              <a:rPr lang="en-US" dirty="0"/>
-              <a:t/>
-            </a:r>
             <a:endParaRPr lang="en-US" dirty="0"/>
           </a:p>
         </p:txBody>
@@ -1039,10 +796,6 @@
           <a:bodyPr/>
           <a:lstStyle/>
           <a:p>
-            <a:r>
-              <a:rPr lang="en-US" dirty="0"/>
-              <a:t/>
-            </a:r>
             <a:endParaRPr lang="en-US" dirty="0"/>
           </a:p>
         </p:txBody>
@@ -1127,10 +880,6 @@
           <a:bodyPr/>
           <a:lstStyle/>
           <a:p>
-            <a:r>
-              <a:rPr lang="en-US" dirty="0"/>
-              <a:t/>
-            </a:r>
             <a:endParaRPr lang="en-US" dirty="0"/>
           </a:p>
         </p:txBody>
@@ -1215,10 +964,6 @@
           <a:bodyPr/>
           <a:lstStyle/>
           <a:p>
-            <a:r>
-              <a:rPr lang="en-US" dirty="0"/>
-              <a:t/>
-            </a:r>
             <a:endParaRPr lang="en-US" dirty="0"/>
           </a:p>
         </p:txBody>
@@ -1303,10 +1048,6 @@
           <a:bodyPr/>
           <a:lstStyle/>
           <a:p>
-            <a:r>
-              <a:rPr lang="en-US" dirty="0"/>
-              <a:t/>
-            </a:r>
             <a:endParaRPr lang="en-US" dirty="0"/>
           </a:p>
         </p:txBody>
@@ -1391,10 +1132,6 @@
           <a:bodyPr/>
           <a:lstStyle/>
           <a:p>
-            <a:r>
-              <a:rPr lang="en-US" dirty="0"/>
-              <a:t/>
-            </a:r>
             <a:endParaRPr lang="en-US" dirty="0"/>
           </a:p>
         </p:txBody>
@@ -1479,10 +1216,6 @@
           <a:bodyPr/>
           <a:lstStyle/>
           <a:p>
-            <a:r>
-              <a:rPr lang="en-US" dirty="0"/>
-              <a:t/>
-            </a:r>
             <a:endParaRPr lang="en-US" dirty="0"/>
           </a:p>
         </p:txBody>
@@ -1556,6 +1289,11 @@
 <file path=ppt/slideMasters/slideMaster1.xml><?xml version="1.0" encoding="utf-8"?>
 <p:sldMaster xmlns:a="http://schemas.openxmlformats.org/drawingml/2006/main" xmlns:r="http://schemas.openxmlformats.org/officeDocument/2006/relationships" xmlns:p="http://schemas.openxmlformats.org/presentationml/2006/main">
   <p:cSld>
+    <p:bg>
+      <p:bgRef idx="1001">
+        <a:schemeClr val="bg1"/>
+      </p:bgRef>
+    </p:bg>
     <p:spTree>
       <p:nvGrpSpPr>
         <p:cNvPr id="1" name=""/>
@@ -1838,6 +1576,7 @@
         <a:solidFill>
           <a:srgbClr val="080C1A"/>
         </a:solidFill>
+        <a:effectLst/>
       </p:bgPr>
     </p:bg>
     <p:spTree>
@@ -1873,6 +1612,13 @@
           </a:solidFill>
           <a:ln/>
         </p:spPr>
+        <p:txBody>
+          <a:bodyPr/>
+          <a:lstStyle/>
+          <a:p>
+            <a:endParaRPr lang="en-US"/>
+          </a:p>
+        </p:txBody>
       </p:sp>
       <p:sp>
         <p:nvSpPr>
@@ -1882,7 +1628,7 @@
         </p:nvSpPr>
         <p:spPr>
           <a:xfrm>
-            <a:off x="7498080" y="-274320"/>
+            <a:off x="7498080" y="-182880"/>
             <a:ext cx="2560320" cy="2560320"/>
           </a:xfrm>
           <a:prstGeom prst="ellipse">
@@ -1900,6 +1646,13 @@
             <a:prstDash val="solid"/>
           </a:ln>
         </p:spPr>
+        <p:txBody>
+          <a:bodyPr/>
+          <a:lstStyle/>
+          <a:p>
+            <a:endParaRPr lang="en-US"/>
+          </a:p>
+        </p:txBody>
       </p:sp>
       <p:sp>
         <p:nvSpPr>
@@ -1927,6 +1680,13 @@
             <a:prstDash val="solid"/>
           </a:ln>
         </p:spPr>
+        <p:txBody>
+          <a:bodyPr/>
+          <a:lstStyle/>
+          <a:p>
+            <a:endParaRPr lang="en-US"/>
+          </a:p>
+        </p:txBody>
       </p:sp>
       <p:sp>
         <p:nvSpPr>
@@ -1936,7 +1696,7 @@
         </p:nvSpPr>
         <p:spPr>
           <a:xfrm>
-            <a:off x="8412480" y="1188720"/>
+            <a:off x="8412480" y="731520"/>
             <a:ext cx="731520" cy="731520"/>
           </a:xfrm>
           <a:prstGeom prst="ellipse">
@@ -1949,6 +1709,13 @@
           </a:solidFill>
           <a:ln/>
         </p:spPr>
+        <p:txBody>
+          <a:bodyPr/>
+          <a:lstStyle/>
+          <a:p>
+            <a:endParaRPr lang="en-US"/>
+          </a:p>
+        </p:txBody>
       </p:sp>
       <p:sp>
         <p:nvSpPr>
@@ -1971,7 +1738,7 @@
           <a:bodyPr wrap="square" lIns="0" tIns="0" rIns="0" bIns="0" rtlCol="0" anchor="ctr"/>
           <a:lstStyle/>
           <a:p>
-            <a:pPr indent="0" marL="0">
+            <a:pPr marL="0" indent="0">
               <a:buNone/>
             </a:pPr>
             <a:r>
@@ -2010,7 +1777,7 @@
           <a:bodyPr wrap="square" lIns="0" tIns="0" rIns="0" bIns="0" rtlCol="0" anchor="ctr"/>
           <a:lstStyle/>
           <a:p>
-            <a:pPr indent="0" marL="0">
+            <a:pPr marL="0" indent="0">
               <a:buNone/>
             </a:pPr>
             <a:r>
@@ -2049,6 +1816,13 @@
           </a:solidFill>
           <a:ln/>
         </p:spPr>
+        <p:txBody>
+          <a:bodyPr/>
+          <a:lstStyle/>
+          <a:p>
+            <a:endParaRPr lang="en-US"/>
+          </a:p>
+        </p:txBody>
       </p:sp>
       <p:sp>
         <p:nvSpPr>
@@ -2071,11 +1845,11 @@
           <a:bodyPr wrap="square" lIns="0" tIns="0" rIns="0" bIns="0" rtlCol="0" anchor="ctr"/>
           <a:lstStyle/>
           <a:p>
-            <a:pPr indent="0" marL="0">
-              <a:buNone/>
-            </a:pPr>
-            <a:r>
-              <a:rPr lang="en-US" sz="1200" spc="100" kern="0" dirty="0">
+            <a:pPr marL="0" indent="0">
+              <a:buNone/>
+            </a:pPr>
+            <a:r>
+              <a:rPr lang="en-US" sz="1200" kern="0" spc="100" dirty="0">
                 <a:solidFill>
                   <a:srgbClr val="94A3B8"/>
                 </a:solidFill>
@@ -2108,6 +1882,13 @@
           </a:solidFill>
           <a:ln/>
         </p:spPr>
+        <p:txBody>
+          <a:bodyPr/>
+          <a:lstStyle/>
+          <a:p>
+            <a:endParaRPr lang="en-US"/>
+          </a:p>
+        </p:txBody>
       </p:sp>
       <p:sp>
         <p:nvSpPr>
@@ -2130,16 +1911,16 @@
           <a:bodyPr wrap="square" lIns="0" tIns="0" rIns="0" bIns="0" rtlCol="0" anchor="ctr"/>
           <a:lstStyle/>
           <a:p>
-            <a:pPr algn="ctr" indent="0" marL="0">
-              <a:buNone/>
-            </a:pPr>
-            <a:r>
-              <a:rPr lang="en-US" sz="800" b="1" spc="150" kern="0" dirty="0">
+            <a:pPr marL="0" indent="0" algn="ctr">
+              <a:buNone/>
+            </a:pPr>
+            <a:r>
+              <a:rPr lang="en-US" sz="800" b="1" kern="0" spc="150" dirty="0">
                 <a:solidFill>
                   <a:srgbClr val="F1F5F9"/>
                 </a:solidFill>
               </a:rPr>
-              <a:t>HACKATHON SUBMISSION</a:t>
+              <a:t>Solution by Jan</a:t>
             </a:r>
             <a:endParaRPr lang="en-US" sz="800" dirty="0"/>
           </a:p>
@@ -2161,6 +1942,7 @@
         <a:solidFill>
           <a:srgbClr val="080C1A"/>
         </a:solidFill>
+        <a:effectLst/>
       </p:bgPr>
     </p:bg>
     <p:spTree>
@@ -2196,6 +1978,13 @@
           </a:solidFill>
           <a:ln/>
         </p:spPr>
+        <p:txBody>
+          <a:bodyPr/>
+          <a:lstStyle/>
+          <a:p>
+            <a:endParaRPr lang="en-US"/>
+          </a:p>
+        </p:txBody>
       </p:sp>
       <p:sp>
         <p:nvSpPr>
@@ -2218,11 +2007,11 @@
           <a:bodyPr wrap="square" lIns="0" tIns="0" rIns="0" bIns="0" rtlCol="0" anchor="ctr"/>
           <a:lstStyle/>
           <a:p>
-            <a:pPr algn="ctr" indent="0" marL="0">
-              <a:buNone/>
-            </a:pPr>
-            <a:r>
-              <a:rPr lang="en-US" sz="800" b="1" spc="200" kern="0" dirty="0">
+            <a:pPr marL="0" indent="0" algn="ctr">
+              <a:buNone/>
+            </a:pPr>
+            <a:r>
+              <a:rPr lang="en-US" sz="800" b="1" kern="0" spc="200" dirty="0">
                 <a:solidFill>
                   <a:srgbClr val="F1F5F9"/>
                 </a:solidFill>
@@ -2254,6 +2043,13 @@
           </a:solidFill>
           <a:ln/>
         </p:spPr>
+        <p:txBody>
+          <a:bodyPr/>
+          <a:lstStyle/>
+          <a:p>
+            <a:endParaRPr lang="en-US"/>
+          </a:p>
+        </p:txBody>
       </p:sp>
       <p:sp>
         <p:nvSpPr>
@@ -2276,7 +2072,7 @@
           <a:bodyPr wrap="square" lIns="0" tIns="0" rIns="0" bIns="0" rtlCol="0" anchor="ctr"/>
           <a:lstStyle/>
           <a:p>
-            <a:pPr indent="0" marL="0">
+            <a:pPr marL="0" indent="0">
               <a:buNone/>
             </a:pPr>
             <a:r>
@@ -2313,6 +2109,13 @@
           </a:solidFill>
           <a:ln/>
         </p:spPr>
+        <p:txBody>
+          <a:bodyPr/>
+          <a:lstStyle/>
+          <a:p>
+            <a:endParaRPr lang="en-US"/>
+          </a:p>
+        </p:txBody>
       </p:sp>
       <p:sp>
         <p:nvSpPr>
@@ -2335,7 +2138,7 @@
           <a:bodyPr wrap="square" lIns="0" tIns="0" rIns="0" bIns="0" rtlCol="0" anchor="ctr"/>
           <a:lstStyle/>
           <a:p>
-            <a:pPr algn="l" indent="0" marL="0">
+            <a:pPr marL="0" indent="0" algn="l">
               <a:buNone/>
             </a:pPr>
             <a:r>
@@ -2371,7 +2174,7 @@
           <a:bodyPr wrap="square" lIns="0" tIns="0" rIns="0" bIns="0" rtlCol="0" anchor="ctr"/>
           <a:lstStyle/>
           <a:p>
-            <a:pPr algn="ctr" indent="0" marL="0">
+            <a:pPr marL="0" indent="0" algn="ctr">
               <a:buNone/>
             </a:pPr>
             <a:r>
@@ -2407,7 +2210,7 @@
           <a:bodyPr wrap="square" lIns="0" tIns="0" rIns="0" bIns="0" rtlCol="0" anchor="ctr"/>
           <a:lstStyle/>
           <a:p>
-            <a:pPr algn="ctr" indent="0" marL="0">
+            <a:pPr marL="0" indent="0" algn="ctr">
               <a:buNone/>
             </a:pPr>
             <a:r>
@@ -2443,7 +2246,7 @@
           <a:bodyPr wrap="square" lIns="0" tIns="0" rIns="0" bIns="0" rtlCol="0" anchor="ctr"/>
           <a:lstStyle/>
           <a:p>
-            <a:pPr algn="ctr" indent="0" marL="0">
+            <a:pPr marL="0" indent="0" algn="ctr">
               <a:buNone/>
             </a:pPr>
             <a:r>
@@ -2479,7 +2282,7 @@
           <a:bodyPr wrap="square" lIns="0" tIns="0" rIns="0" bIns="0" rtlCol="0" anchor="ctr"/>
           <a:lstStyle/>
           <a:p>
-            <a:pPr algn="ctr" indent="0" marL="0">
+            <a:pPr marL="0" indent="0" algn="ctr">
               <a:buNone/>
             </a:pPr>
             <a:r>
@@ -2513,6 +2316,13 @@
           </a:solidFill>
           <a:ln/>
         </p:spPr>
+        <p:txBody>
+          <a:bodyPr/>
+          <a:lstStyle/>
+          <a:p>
+            <a:endParaRPr lang="en-US"/>
+          </a:p>
+        </p:txBody>
       </p:sp>
       <p:sp>
         <p:nvSpPr>
@@ -2533,6 +2343,13 @@
           </a:solidFill>
           <a:ln/>
         </p:spPr>
+        <p:txBody>
+          <a:bodyPr/>
+          <a:lstStyle/>
+          <a:p>
+            <a:endParaRPr lang="en-US"/>
+          </a:p>
+        </p:txBody>
       </p:sp>
       <p:sp>
         <p:nvSpPr>
@@ -2555,7 +2372,7 @@
           <a:bodyPr wrap="square" lIns="0" tIns="0" rIns="0" bIns="0" rtlCol="0" anchor="ctr"/>
           <a:lstStyle/>
           <a:p>
-            <a:pPr algn="l" indent="0" marL="0">
+            <a:pPr marL="0" indent="0" algn="l">
               <a:buNone/>
             </a:pPr>
             <a:r>
@@ -2594,7 +2411,7 @@
           <a:bodyPr wrap="square" lIns="0" tIns="0" rIns="0" bIns="0" rtlCol="0" anchor="ctr"/>
           <a:lstStyle/>
           <a:p>
-            <a:pPr algn="ctr" indent="0" marL="0">
+            <a:pPr marL="0" indent="0" algn="ctr">
               <a:buNone/>
             </a:pPr>
             <a:r>
@@ -2633,7 +2450,7 @@
           <a:bodyPr wrap="square" lIns="0" tIns="0" rIns="0" bIns="0" rtlCol="0" anchor="ctr"/>
           <a:lstStyle/>
           <a:p>
-            <a:pPr algn="ctr" indent="0" marL="0">
+            <a:pPr marL="0" indent="0" algn="ctr">
               <a:buNone/>
             </a:pPr>
             <a:r>
@@ -2672,7 +2489,7 @@
           <a:bodyPr wrap="square" lIns="0" tIns="0" rIns="0" bIns="0" rtlCol="0" anchor="ctr"/>
           <a:lstStyle/>
           <a:p>
-            <a:pPr algn="ctr" indent="0" marL="0">
+            <a:pPr marL="0" indent="0" algn="ctr">
               <a:buNone/>
             </a:pPr>
             <a:r>
@@ -2711,7 +2528,7 @@
           <a:bodyPr wrap="square" lIns="0" tIns="0" rIns="0" bIns="0" rtlCol="0" anchor="ctr"/>
           <a:lstStyle/>
           <a:p>
-            <a:pPr algn="ctr" indent="0" marL="0">
+            <a:pPr marL="0" indent="0" algn="ctr">
               <a:buNone/>
             </a:pPr>
             <a:r>
@@ -2748,6 +2565,13 @@
           </a:solidFill>
           <a:ln/>
         </p:spPr>
+        <p:txBody>
+          <a:bodyPr/>
+          <a:lstStyle/>
+          <a:p>
+            <a:endParaRPr lang="en-US"/>
+          </a:p>
+        </p:txBody>
       </p:sp>
       <p:sp>
         <p:nvSpPr>
@@ -2770,7 +2594,7 @@
           <a:bodyPr wrap="square" lIns="0" tIns="0" rIns="0" bIns="0" rtlCol="0" anchor="ctr"/>
           <a:lstStyle/>
           <a:p>
-            <a:pPr algn="l" indent="0" marL="0">
+            <a:pPr marL="0" indent="0" algn="l">
               <a:buNone/>
             </a:pPr>
             <a:r>
@@ -2809,7 +2633,7 @@
           <a:bodyPr wrap="square" lIns="0" tIns="0" rIns="0" bIns="0" rtlCol="0" anchor="ctr"/>
           <a:lstStyle/>
           <a:p>
-            <a:pPr algn="ctr" indent="0" marL="0">
+            <a:pPr marL="0" indent="0" algn="ctr">
               <a:buNone/>
             </a:pPr>
             <a:r>
@@ -2848,7 +2672,7 @@
           <a:bodyPr wrap="square" lIns="0" tIns="0" rIns="0" bIns="0" rtlCol="0" anchor="ctr"/>
           <a:lstStyle/>
           <a:p>
-            <a:pPr algn="ctr" indent="0" marL="0">
+            <a:pPr marL="0" indent="0" algn="ctr">
               <a:buNone/>
             </a:pPr>
             <a:r>
@@ -2887,7 +2711,7 @@
           <a:bodyPr wrap="square" lIns="0" tIns="0" rIns="0" bIns="0" rtlCol="0" anchor="ctr"/>
           <a:lstStyle/>
           <a:p>
-            <a:pPr algn="ctr" indent="0" marL="0">
+            <a:pPr marL="0" indent="0" algn="ctr">
               <a:buNone/>
             </a:pPr>
             <a:r>
@@ -2926,7 +2750,7 @@
           <a:bodyPr wrap="square" lIns="0" tIns="0" rIns="0" bIns="0" rtlCol="0" anchor="ctr"/>
           <a:lstStyle/>
           <a:p>
-            <a:pPr algn="ctr" indent="0" marL="0">
+            <a:pPr marL="0" indent="0" algn="ctr">
               <a:buNone/>
             </a:pPr>
             <a:r>
@@ -2963,6 +2787,13 @@
           </a:solidFill>
           <a:ln/>
         </p:spPr>
+        <p:txBody>
+          <a:bodyPr/>
+          <a:lstStyle/>
+          <a:p>
+            <a:endParaRPr lang="en-US"/>
+          </a:p>
+        </p:txBody>
       </p:sp>
       <p:sp>
         <p:nvSpPr>
@@ -2985,7 +2816,7 @@
           <a:bodyPr wrap="square" lIns="0" tIns="0" rIns="0" bIns="0" rtlCol="0" anchor="ctr"/>
           <a:lstStyle/>
           <a:p>
-            <a:pPr algn="l" indent="0" marL="0">
+            <a:pPr marL="0" indent="0" algn="l">
               <a:buNone/>
             </a:pPr>
             <a:r>
@@ -3024,7 +2855,7 @@
           <a:bodyPr wrap="square" lIns="0" tIns="0" rIns="0" bIns="0" rtlCol="0" anchor="ctr"/>
           <a:lstStyle/>
           <a:p>
-            <a:pPr algn="ctr" indent="0" marL="0">
+            <a:pPr marL="0" indent="0" algn="ctr">
               <a:buNone/>
             </a:pPr>
             <a:r>
@@ -3063,7 +2894,7 @@
           <a:bodyPr wrap="square" lIns="0" tIns="0" rIns="0" bIns="0" rtlCol="0" anchor="ctr"/>
           <a:lstStyle/>
           <a:p>
-            <a:pPr algn="ctr" indent="0" marL="0">
+            <a:pPr marL="0" indent="0" algn="ctr">
               <a:buNone/>
             </a:pPr>
             <a:r>
@@ -3102,7 +2933,7 @@
           <a:bodyPr wrap="square" lIns="0" tIns="0" rIns="0" bIns="0" rtlCol="0" anchor="ctr"/>
           <a:lstStyle/>
           <a:p>
-            <a:pPr algn="ctr" indent="0" marL="0">
+            <a:pPr marL="0" indent="0" algn="ctr">
               <a:buNone/>
             </a:pPr>
             <a:r>
@@ -3141,7 +2972,7 @@
           <a:bodyPr wrap="square" lIns="0" tIns="0" rIns="0" bIns="0" rtlCol="0" anchor="ctr"/>
           <a:lstStyle/>
           <a:p>
-            <a:pPr algn="ctr" indent="0" marL="0">
+            <a:pPr marL="0" indent="0" algn="ctr">
               <a:buNone/>
             </a:pPr>
             <a:r>
@@ -3178,6 +3009,13 @@
           </a:solidFill>
           <a:ln/>
         </p:spPr>
+        <p:txBody>
+          <a:bodyPr/>
+          <a:lstStyle/>
+          <a:p>
+            <a:endParaRPr lang="en-US"/>
+          </a:p>
+        </p:txBody>
       </p:sp>
       <p:sp>
         <p:nvSpPr>
@@ -3200,7 +3038,7 @@
           <a:bodyPr wrap="square" lIns="0" tIns="0" rIns="0" bIns="0" rtlCol="0" anchor="ctr"/>
           <a:lstStyle/>
           <a:p>
-            <a:pPr algn="l" indent="0" marL="0">
+            <a:pPr marL="0" indent="0" algn="l">
               <a:buNone/>
             </a:pPr>
             <a:r>
@@ -3239,7 +3077,7 @@
           <a:bodyPr wrap="square" lIns="0" tIns="0" rIns="0" bIns="0" rtlCol="0" anchor="ctr"/>
           <a:lstStyle/>
           <a:p>
-            <a:pPr algn="ctr" indent="0" marL="0">
+            <a:pPr marL="0" indent="0" algn="ctr">
               <a:buNone/>
             </a:pPr>
             <a:r>
@@ -3278,7 +3116,7 @@
           <a:bodyPr wrap="square" lIns="0" tIns="0" rIns="0" bIns="0" rtlCol="0" anchor="ctr"/>
           <a:lstStyle/>
           <a:p>
-            <a:pPr algn="ctr" indent="0" marL="0">
+            <a:pPr marL="0" indent="0" algn="ctr">
               <a:buNone/>
             </a:pPr>
             <a:r>
@@ -3317,7 +3155,7 @@
           <a:bodyPr wrap="square" lIns="0" tIns="0" rIns="0" bIns="0" rtlCol="0" anchor="ctr"/>
           <a:lstStyle/>
           <a:p>
-            <a:pPr algn="ctr" indent="0" marL="0">
+            <a:pPr marL="0" indent="0" algn="ctr">
               <a:buNone/>
             </a:pPr>
             <a:r>
@@ -3356,7 +3194,7 @@
           <a:bodyPr wrap="square" lIns="0" tIns="0" rIns="0" bIns="0" rtlCol="0" anchor="ctr"/>
           <a:lstStyle/>
           <a:p>
-            <a:pPr algn="ctr" indent="0" marL="0">
+            <a:pPr marL="0" indent="0" algn="ctr">
               <a:buNone/>
             </a:pPr>
             <a:r>
@@ -3393,6 +3231,13 @@
           </a:solidFill>
           <a:ln/>
         </p:spPr>
+        <p:txBody>
+          <a:bodyPr/>
+          <a:lstStyle/>
+          <a:p>
+            <a:endParaRPr lang="en-US"/>
+          </a:p>
+        </p:txBody>
       </p:sp>
       <p:sp>
         <p:nvSpPr>
@@ -3415,7 +3260,7 @@
           <a:bodyPr wrap="square" lIns="0" tIns="0" rIns="0" bIns="0" rtlCol="0" anchor="ctr"/>
           <a:lstStyle/>
           <a:p>
-            <a:pPr algn="l" indent="0" marL="0">
+            <a:pPr marL="0" indent="0" algn="l">
               <a:buNone/>
             </a:pPr>
             <a:r>
@@ -3454,7 +3299,7 @@
           <a:bodyPr wrap="square" lIns="0" tIns="0" rIns="0" bIns="0" rtlCol="0" anchor="ctr"/>
           <a:lstStyle/>
           <a:p>
-            <a:pPr algn="ctr" indent="0" marL="0">
+            <a:pPr marL="0" indent="0" algn="ctr">
               <a:buNone/>
             </a:pPr>
             <a:r>
@@ -3493,7 +3338,7 @@
           <a:bodyPr wrap="square" lIns="0" tIns="0" rIns="0" bIns="0" rtlCol="0" anchor="ctr"/>
           <a:lstStyle/>
           <a:p>
-            <a:pPr algn="ctr" indent="0" marL="0">
+            <a:pPr marL="0" indent="0" algn="ctr">
               <a:buNone/>
             </a:pPr>
             <a:r>
@@ -3532,7 +3377,7 @@
           <a:bodyPr wrap="square" lIns="0" tIns="0" rIns="0" bIns="0" rtlCol="0" anchor="ctr"/>
           <a:lstStyle/>
           <a:p>
-            <a:pPr algn="ctr" indent="0" marL="0">
+            <a:pPr marL="0" indent="0" algn="ctr">
               <a:buNone/>
             </a:pPr>
             <a:r>
@@ -3571,7 +3416,7 @@
           <a:bodyPr wrap="square" lIns="0" tIns="0" rIns="0" bIns="0" rtlCol="0" anchor="ctr"/>
           <a:lstStyle/>
           <a:p>
-            <a:pPr algn="ctr" indent="0" marL="0">
+            <a:pPr marL="0" indent="0" algn="ctr">
               <a:buNone/>
             </a:pPr>
             <a:r>
@@ -3597,7 +3442,7 @@
         </p:nvSpPr>
         <p:spPr>
           <a:xfrm>
-            <a:off x="457200" y="4434840"/>
+            <a:off x="457200" y="4740461"/>
             <a:ext cx="8412480" cy="365760"/>
           </a:xfrm>
           <a:prstGeom prst="rect">
@@ -3610,7 +3455,7 @@
           <a:bodyPr wrap="square" lIns="0" tIns="0" rIns="0" bIns="0" rtlCol="0" anchor="ctr"/>
           <a:lstStyle/>
           <a:p>
-            <a:pPr indent="0" marL="0">
+            <a:pPr marL="0" indent="0">
               <a:buNone/>
             </a:pPr>
             <a:r>
@@ -3641,6 +3486,7 @@
         <a:solidFill>
           <a:srgbClr val="0F1A2E"/>
         </a:solidFill>
+        <a:effectLst/>
       </p:bgPr>
     </p:bg>
     <p:spTree>
@@ -3676,6 +3522,13 @@
           </a:solidFill>
           <a:ln/>
         </p:spPr>
+        <p:txBody>
+          <a:bodyPr/>
+          <a:lstStyle/>
+          <a:p>
+            <a:endParaRPr lang="en-US"/>
+          </a:p>
+        </p:txBody>
       </p:sp>
       <p:sp>
         <p:nvSpPr>
@@ -3698,11 +3551,11 @@
           <a:bodyPr wrap="square" lIns="0" tIns="0" rIns="0" bIns="0" rtlCol="0" anchor="ctr"/>
           <a:lstStyle/>
           <a:p>
-            <a:pPr algn="ctr" indent="0" marL="0">
-              <a:buNone/>
-            </a:pPr>
-            <a:r>
-              <a:rPr lang="en-US" sz="800" b="1" spc="200" kern="0" dirty="0">
+            <a:pPr marL="0" indent="0" algn="ctr">
+              <a:buNone/>
+            </a:pPr>
+            <a:r>
+              <a:rPr lang="en-US" sz="800" b="1" kern="0" spc="200" dirty="0">
                 <a:solidFill>
                   <a:srgbClr val="F1F5F9"/>
                 </a:solidFill>
@@ -3734,6 +3587,13 @@
           </a:solidFill>
           <a:ln/>
         </p:spPr>
+        <p:txBody>
+          <a:bodyPr/>
+          <a:lstStyle/>
+          <a:p>
+            <a:endParaRPr lang="en-US"/>
+          </a:p>
+        </p:txBody>
       </p:sp>
       <p:sp>
         <p:nvSpPr>
@@ -3756,7 +3616,7 @@
           <a:bodyPr wrap="square" lIns="0" tIns="0" rIns="0" bIns="0" rtlCol="0" anchor="ctr"/>
           <a:lstStyle/>
           <a:p>
-            <a:pPr indent="0" marL="0">
+            <a:pPr marL="0" indent="0">
               <a:buNone/>
             </a:pPr>
             <a:r>
@@ -3795,6 +3655,13 @@
           </a:solidFill>
           <a:ln/>
         </p:spPr>
+        <p:txBody>
+          <a:bodyPr/>
+          <a:lstStyle/>
+          <a:p>
+            <a:endParaRPr lang="en-US"/>
+          </a:p>
+        </p:txBody>
       </p:sp>
       <p:sp>
         <p:nvSpPr>
@@ -3815,6 +3682,13 @@
           </a:solidFill>
           <a:ln/>
         </p:spPr>
+        <p:txBody>
+          <a:bodyPr/>
+          <a:lstStyle/>
+          <a:p>
+            <a:endParaRPr lang="en-US"/>
+          </a:p>
+        </p:txBody>
       </p:sp>
       <p:sp>
         <p:nvSpPr>
@@ -3837,7 +3711,7 @@
           <a:bodyPr wrap="square" lIns="0" tIns="0" rIns="0" bIns="0" rtlCol="0" anchor="ctr"/>
           <a:lstStyle/>
           <a:p>
-            <a:pPr algn="ctr" indent="0" marL="0">
+            <a:pPr marL="0" indent="0" algn="ctr">
               <a:buNone/>
             </a:pPr>
             <a:r>
@@ -3871,13 +3745,20 @@
           </a:solidFill>
           <a:ln/>
           <a:effectLst>
-            <a:outerShdw sx="100000" sy="100000" kx="0" ky="0" algn="bl" rotWithShape="0" blurRad="127000" dist="38100" dir="8100000">
+            <a:outerShdw blurRad="127000" dist="38100" dir="8100000" algn="bl" rotWithShape="0">
               <a:srgbClr val="000000">
                 <a:alpha val="30000"/>
               </a:srgbClr>
             </a:outerShdw>
           </a:effectLst>
         </p:spPr>
+        <p:txBody>
+          <a:bodyPr/>
+          <a:lstStyle/>
+          <a:p>
+            <a:endParaRPr lang="en-US"/>
+          </a:p>
+        </p:txBody>
       </p:sp>
       <p:sp>
         <p:nvSpPr>
@@ -3898,6 +3779,13 @@
           </a:solidFill>
           <a:ln/>
         </p:spPr>
+        <p:txBody>
+          <a:bodyPr/>
+          <a:lstStyle/>
+          <a:p>
+            <a:endParaRPr lang="en-US"/>
+          </a:p>
+        </p:txBody>
       </p:sp>
       <p:sp>
         <p:nvSpPr>
@@ -3918,6 +3806,13 @@
           </a:solidFill>
           <a:ln/>
         </p:spPr>
+        <p:txBody>
+          <a:bodyPr/>
+          <a:lstStyle/>
+          <a:p>
+            <a:endParaRPr lang="en-US"/>
+          </a:p>
+        </p:txBody>
       </p:sp>
       <p:sp>
         <p:nvSpPr>
@@ -3927,7 +3822,7 @@
         </p:nvSpPr>
         <p:spPr>
           <a:xfrm>
-            <a:off x="932688" y="2084832"/>
+            <a:off x="932688" y="1979324"/>
             <a:ext cx="2194560" cy="438912"/>
           </a:xfrm>
           <a:prstGeom prst="rect">
@@ -3940,7 +3835,7 @@
           <a:bodyPr wrap="square" lIns="0" tIns="0" rIns="0" bIns="0" rtlCol="0" anchor="ctr"/>
           <a:lstStyle/>
           <a:p>
-            <a:pPr indent="0" marL="0">
+            <a:pPr marL="0" indent="0">
               <a:buNone/>
             </a:pPr>
             <a:r>
@@ -3974,6 +3869,13 @@
           </a:solidFill>
           <a:ln/>
         </p:spPr>
+        <p:txBody>
+          <a:bodyPr/>
+          <a:lstStyle/>
+          <a:p>
+            <a:endParaRPr lang="en-US"/>
+          </a:p>
+        </p:txBody>
       </p:sp>
       <p:sp>
         <p:nvSpPr>
@@ -3983,7 +3885,7 @@
         </p:nvSpPr>
         <p:spPr>
           <a:xfrm>
-            <a:off x="932688" y="2615184"/>
+            <a:off x="932688" y="2509676"/>
             <a:ext cx="2194560" cy="438912"/>
           </a:xfrm>
           <a:prstGeom prst="rect">
@@ -3996,7 +3898,7 @@
           <a:bodyPr wrap="square" lIns="0" tIns="0" rIns="0" bIns="0" rtlCol="0" anchor="ctr"/>
           <a:lstStyle/>
           <a:p>
-            <a:pPr indent="0" marL="0">
+            <a:pPr marL="0" indent="0">
               <a:buNone/>
             </a:pPr>
             <a:r>
@@ -4030,6 +3932,13 @@
           </a:solidFill>
           <a:ln/>
         </p:spPr>
+        <p:txBody>
+          <a:bodyPr/>
+          <a:lstStyle/>
+          <a:p>
+            <a:endParaRPr lang="en-US"/>
+          </a:p>
+        </p:txBody>
       </p:sp>
       <p:sp>
         <p:nvSpPr>
@@ -4039,7 +3948,7 @@
         </p:nvSpPr>
         <p:spPr>
           <a:xfrm>
-            <a:off x="932688" y="3145536"/>
+            <a:off x="932688" y="3040028"/>
             <a:ext cx="2194560" cy="438912"/>
           </a:xfrm>
           <a:prstGeom prst="rect">
@@ -4052,7 +3961,7 @@
           <a:bodyPr wrap="square" lIns="0" tIns="0" rIns="0" bIns="0" rtlCol="0" anchor="ctr"/>
           <a:lstStyle/>
           <a:p>
-            <a:pPr indent="0" marL="0">
+            <a:pPr marL="0" indent="0">
               <a:buNone/>
             </a:pPr>
             <a:r>
@@ -4086,6 +3995,13 @@
           </a:solidFill>
           <a:ln/>
         </p:spPr>
+        <p:txBody>
+          <a:bodyPr/>
+          <a:lstStyle/>
+          <a:p>
+            <a:endParaRPr lang="en-US"/>
+          </a:p>
+        </p:txBody>
       </p:sp>
       <p:sp>
         <p:nvSpPr>
@@ -4095,7 +4011,7 @@
         </p:nvSpPr>
         <p:spPr>
           <a:xfrm>
-            <a:off x="932688" y="3675888"/>
+            <a:off x="932688" y="3570380"/>
             <a:ext cx="2194560" cy="438912"/>
           </a:xfrm>
           <a:prstGeom prst="rect">
@@ -4108,7 +4024,7 @@
           <a:bodyPr wrap="square" lIns="0" tIns="0" rIns="0" bIns="0" rtlCol="0" anchor="ctr"/>
           <a:lstStyle/>
           <a:p>
-            <a:pPr indent="0" marL="0">
+            <a:pPr marL="0" indent="0">
               <a:buNone/>
             </a:pPr>
             <a:r>
@@ -4142,6 +4058,13 @@
           </a:solidFill>
           <a:ln/>
         </p:spPr>
+        <p:txBody>
+          <a:bodyPr/>
+          <a:lstStyle/>
+          <a:p>
+            <a:endParaRPr lang="en-US"/>
+          </a:p>
+        </p:txBody>
       </p:sp>
       <p:sp>
         <p:nvSpPr>
@@ -4164,7 +4087,7 @@
           <a:bodyPr wrap="square" lIns="0" tIns="0" rIns="0" bIns="0" rtlCol="0" anchor="ctr"/>
           <a:lstStyle/>
           <a:p>
-            <a:pPr algn="ctr" indent="0" marL="0">
+            <a:pPr marL="0" indent="0" algn="ctr">
               <a:buNone/>
             </a:pPr>
             <a:r>
@@ -4198,13 +4121,20 @@
           </a:solidFill>
           <a:ln/>
           <a:effectLst>
-            <a:outerShdw sx="100000" sy="100000" kx="0" ky="0" algn="bl" rotWithShape="0" blurRad="127000" dist="38100" dir="8100000">
+            <a:outerShdw blurRad="127000" dist="38100" dir="8100000" algn="bl" rotWithShape="0">
               <a:srgbClr val="000000">
                 <a:alpha val="30000"/>
               </a:srgbClr>
             </a:outerShdw>
           </a:effectLst>
         </p:spPr>
+        <p:txBody>
+          <a:bodyPr/>
+          <a:lstStyle/>
+          <a:p>
+            <a:endParaRPr lang="en-US"/>
+          </a:p>
+        </p:txBody>
       </p:sp>
       <p:sp>
         <p:nvSpPr>
@@ -4225,6 +4155,13 @@
           </a:solidFill>
           <a:ln/>
         </p:spPr>
+        <p:txBody>
+          <a:bodyPr/>
+          <a:lstStyle/>
+          <a:p>
+            <a:endParaRPr lang="en-US"/>
+          </a:p>
+        </p:txBody>
       </p:sp>
       <p:sp>
         <p:nvSpPr>
@@ -4245,6 +4182,13 @@
           </a:solidFill>
           <a:ln/>
         </p:spPr>
+        <p:txBody>
+          <a:bodyPr/>
+          <a:lstStyle/>
+          <a:p>
+            <a:endParaRPr lang="en-US"/>
+          </a:p>
+        </p:txBody>
       </p:sp>
       <p:sp>
         <p:nvSpPr>
@@ -4254,7 +4198,7 @@
         </p:nvSpPr>
         <p:spPr>
           <a:xfrm>
-            <a:off x="3493008" y="2084832"/>
+            <a:off x="3493008" y="1979324"/>
             <a:ext cx="2194560" cy="438912"/>
           </a:xfrm>
           <a:prstGeom prst="rect">
@@ -4267,7 +4211,7 @@
           <a:bodyPr wrap="square" lIns="0" tIns="0" rIns="0" bIns="0" rtlCol="0" anchor="ctr"/>
           <a:lstStyle/>
           <a:p>
-            <a:pPr indent="0" marL="0">
+            <a:pPr marL="0" indent="0">
               <a:buNone/>
             </a:pPr>
             <a:r>
@@ -4301,6 +4245,13 @@
           </a:solidFill>
           <a:ln/>
         </p:spPr>
+        <p:txBody>
+          <a:bodyPr/>
+          <a:lstStyle/>
+          <a:p>
+            <a:endParaRPr lang="en-US"/>
+          </a:p>
+        </p:txBody>
       </p:sp>
       <p:sp>
         <p:nvSpPr>
@@ -4310,7 +4261,7 @@
         </p:nvSpPr>
         <p:spPr>
           <a:xfrm>
-            <a:off x="3493008" y="2615184"/>
+            <a:off x="3493008" y="2509676"/>
             <a:ext cx="2194560" cy="438912"/>
           </a:xfrm>
           <a:prstGeom prst="rect">
@@ -4323,7 +4274,7 @@
           <a:bodyPr wrap="square" lIns="0" tIns="0" rIns="0" bIns="0" rtlCol="0" anchor="ctr"/>
           <a:lstStyle/>
           <a:p>
-            <a:pPr indent="0" marL="0">
+            <a:pPr marL="0" indent="0">
               <a:buNone/>
             </a:pPr>
             <a:r>
@@ -4357,6 +4308,13 @@
           </a:solidFill>
           <a:ln/>
         </p:spPr>
+        <p:txBody>
+          <a:bodyPr/>
+          <a:lstStyle/>
+          <a:p>
+            <a:endParaRPr lang="en-US"/>
+          </a:p>
+        </p:txBody>
       </p:sp>
       <p:sp>
         <p:nvSpPr>
@@ -4366,7 +4324,7 @@
         </p:nvSpPr>
         <p:spPr>
           <a:xfrm>
-            <a:off x="3493008" y="3145536"/>
+            <a:off x="3493008" y="3040028"/>
             <a:ext cx="2194560" cy="438912"/>
           </a:xfrm>
           <a:prstGeom prst="rect">
@@ -4379,7 +4337,7 @@
           <a:bodyPr wrap="square" lIns="0" tIns="0" rIns="0" bIns="0" rtlCol="0" anchor="ctr"/>
           <a:lstStyle/>
           <a:p>
-            <a:pPr indent="0" marL="0">
+            <a:pPr marL="0" indent="0">
               <a:buNone/>
             </a:pPr>
             <a:r>
@@ -4413,6 +4371,13 @@
           </a:solidFill>
           <a:ln/>
         </p:spPr>
+        <p:txBody>
+          <a:bodyPr/>
+          <a:lstStyle/>
+          <a:p>
+            <a:endParaRPr lang="en-US"/>
+          </a:p>
+        </p:txBody>
       </p:sp>
       <p:sp>
         <p:nvSpPr>
@@ -4422,7 +4387,7 @@
         </p:nvSpPr>
         <p:spPr>
           <a:xfrm>
-            <a:off x="3493008" y="3675888"/>
+            <a:off x="3493008" y="3570380"/>
             <a:ext cx="2194560" cy="438912"/>
           </a:xfrm>
           <a:prstGeom prst="rect">
@@ -4435,7 +4400,7 @@
           <a:bodyPr wrap="square" lIns="0" tIns="0" rIns="0" bIns="0" rtlCol="0" anchor="ctr"/>
           <a:lstStyle/>
           <a:p>
-            <a:pPr indent="0" marL="0">
+            <a:pPr marL="0" indent="0">
               <a:buNone/>
             </a:pPr>
             <a:r>
@@ -4469,6 +4434,13 @@
           </a:solidFill>
           <a:ln/>
         </p:spPr>
+        <p:txBody>
+          <a:bodyPr/>
+          <a:lstStyle/>
+          <a:p>
+            <a:endParaRPr lang="en-US"/>
+          </a:p>
+        </p:txBody>
       </p:sp>
       <p:sp>
         <p:nvSpPr>
@@ -4491,7 +4463,7 @@
           <a:bodyPr wrap="square" lIns="0" tIns="0" rIns="0" bIns="0" rtlCol="0" anchor="ctr"/>
           <a:lstStyle/>
           <a:p>
-            <a:pPr algn="ctr" indent="0" marL="0">
+            <a:pPr marL="0" indent="0" algn="ctr">
               <a:buNone/>
             </a:pPr>
             <a:r>
@@ -4525,13 +4497,20 @@
           </a:solidFill>
           <a:ln/>
           <a:effectLst>
-            <a:outerShdw sx="100000" sy="100000" kx="0" ky="0" algn="bl" rotWithShape="0" blurRad="127000" dist="38100" dir="8100000">
+            <a:outerShdw blurRad="127000" dist="38100" dir="8100000" algn="bl" rotWithShape="0">
               <a:srgbClr val="000000">
                 <a:alpha val="30000"/>
               </a:srgbClr>
             </a:outerShdw>
           </a:effectLst>
         </p:spPr>
+        <p:txBody>
+          <a:bodyPr/>
+          <a:lstStyle/>
+          <a:p>
+            <a:endParaRPr lang="en-US"/>
+          </a:p>
+        </p:txBody>
       </p:sp>
       <p:sp>
         <p:nvSpPr>
@@ -4552,6 +4531,13 @@
           </a:solidFill>
           <a:ln/>
         </p:spPr>
+        <p:txBody>
+          <a:bodyPr/>
+          <a:lstStyle/>
+          <a:p>
+            <a:endParaRPr lang="en-US"/>
+          </a:p>
+        </p:txBody>
       </p:sp>
       <p:sp>
         <p:nvSpPr>
@@ -4572,6 +4558,13 @@
           </a:solidFill>
           <a:ln/>
         </p:spPr>
+        <p:txBody>
+          <a:bodyPr/>
+          <a:lstStyle/>
+          <a:p>
+            <a:endParaRPr lang="en-US"/>
+          </a:p>
+        </p:txBody>
       </p:sp>
       <p:sp>
         <p:nvSpPr>
@@ -4581,7 +4574,7 @@
         </p:nvSpPr>
         <p:spPr>
           <a:xfrm>
-            <a:off x="6510528" y="2084832"/>
+            <a:off x="6510528" y="1979324"/>
             <a:ext cx="2194560" cy="438912"/>
           </a:xfrm>
           <a:prstGeom prst="rect">
@@ -4594,7 +4587,7 @@
           <a:bodyPr wrap="square" lIns="0" tIns="0" rIns="0" bIns="0" rtlCol="0" anchor="ctr"/>
           <a:lstStyle/>
           <a:p>
-            <a:pPr indent="0" marL="0">
+            <a:pPr marL="0" indent="0">
               <a:buNone/>
             </a:pPr>
             <a:r>
@@ -4628,6 +4621,13 @@
           </a:solidFill>
           <a:ln/>
         </p:spPr>
+        <p:txBody>
+          <a:bodyPr/>
+          <a:lstStyle/>
+          <a:p>
+            <a:endParaRPr lang="en-US"/>
+          </a:p>
+        </p:txBody>
       </p:sp>
       <p:sp>
         <p:nvSpPr>
@@ -4637,7 +4637,7 @@
         </p:nvSpPr>
         <p:spPr>
           <a:xfrm>
-            <a:off x="6510528" y="2615184"/>
+            <a:off x="6510528" y="2509676"/>
             <a:ext cx="2194560" cy="438912"/>
           </a:xfrm>
           <a:prstGeom prst="rect">
@@ -4650,7 +4650,7 @@
           <a:bodyPr wrap="square" lIns="0" tIns="0" rIns="0" bIns="0" rtlCol="0" anchor="ctr"/>
           <a:lstStyle/>
           <a:p>
-            <a:pPr indent="0" marL="0">
+            <a:pPr marL="0" indent="0">
               <a:buNone/>
             </a:pPr>
             <a:r>
@@ -4684,6 +4684,13 @@
           </a:solidFill>
           <a:ln/>
         </p:spPr>
+        <p:txBody>
+          <a:bodyPr/>
+          <a:lstStyle/>
+          <a:p>
+            <a:endParaRPr lang="en-US"/>
+          </a:p>
+        </p:txBody>
       </p:sp>
       <p:sp>
         <p:nvSpPr>
@@ -4693,7 +4700,7 @@
         </p:nvSpPr>
         <p:spPr>
           <a:xfrm>
-            <a:off x="6510528" y="3145536"/>
+            <a:off x="6510528" y="3040028"/>
             <a:ext cx="2194560" cy="438912"/>
           </a:xfrm>
           <a:prstGeom prst="rect">
@@ -4706,7 +4713,7 @@
           <a:bodyPr wrap="square" lIns="0" tIns="0" rIns="0" bIns="0" rtlCol="0" anchor="ctr"/>
           <a:lstStyle/>
           <a:p>
-            <a:pPr indent="0" marL="0">
+            <a:pPr marL="0" indent="0">
               <a:buNone/>
             </a:pPr>
             <a:r>
@@ -4740,6 +4747,13 @@
           </a:solidFill>
           <a:ln/>
         </p:spPr>
+        <p:txBody>
+          <a:bodyPr/>
+          <a:lstStyle/>
+          <a:p>
+            <a:endParaRPr lang="en-US"/>
+          </a:p>
+        </p:txBody>
       </p:sp>
       <p:sp>
         <p:nvSpPr>
@@ -4749,7 +4763,7 @@
         </p:nvSpPr>
         <p:spPr>
           <a:xfrm>
-            <a:off x="6510528" y="3675888"/>
+            <a:off x="6510528" y="3570380"/>
             <a:ext cx="2194560" cy="438912"/>
           </a:xfrm>
           <a:prstGeom prst="rect">
@@ -4762,7 +4776,7 @@
           <a:bodyPr wrap="square" lIns="0" tIns="0" rIns="0" bIns="0" rtlCol="0" anchor="ctr"/>
           <a:lstStyle/>
           <a:p>
-            <a:pPr indent="0" marL="0">
+            <a:pPr marL="0" indent="0">
               <a:buNone/>
             </a:pPr>
             <a:r>
@@ -4793,6 +4807,7 @@
         <a:solidFill>
           <a:srgbClr val="080C1A"/>
         </a:solidFill>
+        <a:effectLst/>
       </p:bgPr>
     </p:bg>
     <p:spTree>
@@ -4830,6 +4845,13 @@
           </a:solidFill>
           <a:ln/>
         </p:spPr>
+        <p:txBody>
+          <a:bodyPr/>
+          <a:lstStyle/>
+          <a:p>
+            <a:endParaRPr lang="en-US"/>
+          </a:p>
+        </p:txBody>
       </p:sp>
       <p:sp>
         <p:nvSpPr>
@@ -4852,6 +4874,13 @@
           </a:solidFill>
           <a:ln/>
         </p:spPr>
+        <p:txBody>
+          <a:bodyPr/>
+          <a:lstStyle/>
+          <a:p>
+            <a:endParaRPr lang="en-US"/>
+          </a:p>
+        </p:txBody>
       </p:sp>
       <p:sp>
         <p:nvSpPr>
@@ -4872,6 +4901,13 @@
           </a:solidFill>
           <a:ln/>
         </p:spPr>
+        <p:txBody>
+          <a:bodyPr/>
+          <a:lstStyle/>
+          <a:p>
+            <a:endParaRPr lang="en-US"/>
+          </a:p>
+        </p:txBody>
       </p:sp>
       <p:sp>
         <p:nvSpPr>
@@ -4894,7 +4930,7 @@
           <a:bodyPr wrap="square" lIns="0" tIns="0" rIns="0" bIns="0" rtlCol="0" anchor="ctr"/>
           <a:lstStyle/>
           <a:p>
-            <a:pPr indent="0" marL="0">
+            <a:pPr marL="0" indent="0">
               <a:buNone/>
             </a:pPr>
             <a:r>
@@ -4933,7 +4969,7 @@
           <a:bodyPr wrap="square" lIns="0" tIns="0" rIns="0" bIns="0" rtlCol="0" anchor="ctr"/>
           <a:lstStyle/>
           <a:p>
-            <a:pPr indent="0" marL="0">
+            <a:pPr marL="0" indent="0">
               <a:buNone/>
             </a:pPr>
             <a:r>
@@ -4972,6 +5008,13 @@
           </a:solidFill>
           <a:ln/>
         </p:spPr>
+        <p:txBody>
+          <a:bodyPr/>
+          <a:lstStyle/>
+          <a:p>
+            <a:endParaRPr lang="en-US"/>
+          </a:p>
+        </p:txBody>
       </p:sp>
       <p:sp>
         <p:nvSpPr>
@@ -4994,7 +5037,7 @@
           <a:bodyPr wrap="square" lIns="0" tIns="0" rIns="0" bIns="0" rtlCol="0" anchor="ctr"/>
           <a:lstStyle/>
           <a:p>
-            <a:pPr indent="0" marL="0">
+            <a:pPr marL="0" indent="0">
               <a:buNone/>
             </a:pPr>
             <a:r>
@@ -5008,7 +5051,7 @@
             <a:endParaRPr lang="en-US" sz="1300" dirty="0"/>
           </a:p>
           <a:p>
-            <a:pPr indent="0" marL="0">
+            <a:pPr marL="0" indent="0">
               <a:buNone/>
             </a:pPr>
             <a:r>
@@ -5022,7 +5065,7 @@
             <a:endParaRPr lang="en-US" sz="1300" dirty="0"/>
           </a:p>
           <a:p>
-            <a:pPr indent="0" marL="0">
+            <a:pPr marL="0" indent="0">
               <a:buNone/>
             </a:pPr>
             <a:r>
@@ -5056,13 +5099,20 @@
           </a:solidFill>
           <a:ln/>
           <a:effectLst>
-            <a:outerShdw sx="100000" sy="100000" kx="0" ky="0" algn="bl" rotWithShape="0" blurRad="127000" dist="38100" dir="8100000">
+            <a:outerShdw blurRad="127000" dist="38100" dir="8100000" algn="bl" rotWithShape="0">
               <a:srgbClr val="000000">
                 <a:alpha val="30000"/>
               </a:srgbClr>
             </a:outerShdw>
           </a:effectLst>
         </p:spPr>
+        <p:txBody>
+          <a:bodyPr/>
+          <a:lstStyle/>
+          <a:p>
+            <a:endParaRPr lang="en-US"/>
+          </a:p>
+        </p:txBody>
       </p:sp>
       <p:sp>
         <p:nvSpPr>
@@ -5085,7 +5135,7 @@
           <a:bodyPr wrap="square" lIns="0" tIns="0" rIns="0" bIns="0" rtlCol="0" anchor="ctr"/>
           <a:lstStyle/>
           <a:p>
-            <a:pPr algn="ctr" indent="0" marL="0">
+            <a:pPr marL="0" indent="0" algn="ctr">
               <a:buNone/>
             </a:pPr>
             <a:r>
@@ -5119,13 +5169,20 @@
           </a:solidFill>
           <a:ln/>
           <a:effectLst>
-            <a:outerShdw sx="100000" sy="100000" kx="0" ky="0" algn="bl" rotWithShape="0" blurRad="127000" dist="38100" dir="8100000">
+            <a:outerShdw blurRad="127000" dist="38100" dir="8100000" algn="bl" rotWithShape="0">
               <a:srgbClr val="000000">
                 <a:alpha val="30000"/>
               </a:srgbClr>
             </a:outerShdw>
           </a:effectLst>
         </p:spPr>
+        <p:txBody>
+          <a:bodyPr/>
+          <a:lstStyle/>
+          <a:p>
+            <a:endParaRPr lang="en-US"/>
+          </a:p>
+        </p:txBody>
       </p:sp>
       <p:sp>
         <p:nvSpPr>
@@ -5146,6 +5203,13 @@
           </a:solidFill>
           <a:ln/>
         </p:spPr>
+        <p:txBody>
+          <a:bodyPr/>
+          <a:lstStyle/>
+          <a:p>
+            <a:endParaRPr lang="en-US"/>
+          </a:p>
+        </p:txBody>
       </p:sp>
       <p:sp>
         <p:nvSpPr>
@@ -5168,7 +5232,7 @@
           <a:bodyPr wrap="square" lIns="0" tIns="0" rIns="0" bIns="0" rtlCol="0" anchor="ctr"/>
           <a:lstStyle/>
           <a:p>
-            <a:pPr algn="ctr" indent="0" marL="0">
+            <a:pPr marL="0" indent="0" algn="ctr">
               <a:buNone/>
             </a:pPr>
             <a:r>
@@ -5202,13 +5266,20 @@
           </a:solidFill>
           <a:ln/>
           <a:effectLst>
-            <a:outerShdw sx="100000" sy="100000" kx="0" ky="0" algn="bl" rotWithShape="0" blurRad="127000" dist="38100" dir="8100000">
+            <a:outerShdw blurRad="127000" dist="38100" dir="8100000" algn="bl" rotWithShape="0">
               <a:srgbClr val="000000">
                 <a:alpha val="30000"/>
               </a:srgbClr>
             </a:outerShdw>
           </a:effectLst>
         </p:spPr>
+        <p:txBody>
+          <a:bodyPr/>
+          <a:lstStyle/>
+          <a:p>
+            <a:endParaRPr lang="en-US"/>
+          </a:p>
+        </p:txBody>
       </p:sp>
       <p:sp>
         <p:nvSpPr>
@@ -5229,6 +5300,13 @@
           </a:solidFill>
           <a:ln/>
         </p:spPr>
+        <p:txBody>
+          <a:bodyPr/>
+          <a:lstStyle/>
+          <a:p>
+            <a:endParaRPr lang="en-US"/>
+          </a:p>
+        </p:txBody>
       </p:sp>
       <p:sp>
         <p:nvSpPr>
@@ -5251,7 +5329,7 @@
           <a:bodyPr wrap="square" lIns="0" tIns="0" rIns="0" bIns="0" rtlCol="0" anchor="ctr"/>
           <a:lstStyle/>
           <a:p>
-            <a:pPr algn="ctr" indent="0" marL="0">
+            <a:pPr marL="0" indent="0" algn="ctr">
               <a:buNone/>
             </a:pPr>
             <a:r>
@@ -5285,6 +5363,7 @@
         <a:solidFill>
           <a:srgbClr val="080C1A"/>
         </a:solidFill>
+        <a:effectLst/>
       </p:bgPr>
     </p:bg>
     <p:spTree>
@@ -5320,6 +5399,13 @@
           </a:solidFill>
           <a:ln/>
         </p:spPr>
+        <p:txBody>
+          <a:bodyPr/>
+          <a:lstStyle/>
+          <a:p>
+            <a:endParaRPr lang="en-US"/>
+          </a:p>
+        </p:txBody>
       </p:sp>
       <p:sp>
         <p:nvSpPr>
@@ -5342,11 +5428,11 @@
           <a:bodyPr wrap="square" lIns="0" tIns="0" rIns="0" bIns="0" rtlCol="0" anchor="ctr"/>
           <a:lstStyle/>
           <a:p>
-            <a:pPr algn="ctr" indent="0" marL="0">
-              <a:buNone/>
-            </a:pPr>
-            <a:r>
-              <a:rPr lang="en-US" sz="800" b="1" spc="200" kern="0" dirty="0">
+            <a:pPr marL="0" indent="0" algn="ctr">
+              <a:buNone/>
+            </a:pPr>
+            <a:r>
+              <a:rPr lang="en-US" sz="800" b="1" kern="0" spc="200" dirty="0">
                 <a:solidFill>
                   <a:srgbClr val="F1F5F9"/>
                 </a:solidFill>
@@ -5378,6 +5464,13 @@
           </a:solidFill>
           <a:ln/>
         </p:spPr>
+        <p:txBody>
+          <a:bodyPr/>
+          <a:lstStyle/>
+          <a:p>
+            <a:endParaRPr lang="en-US"/>
+          </a:p>
+        </p:txBody>
       </p:sp>
       <p:sp>
         <p:nvSpPr>
@@ -5400,7 +5493,7 @@
           <a:bodyPr wrap="square" lIns="0" tIns="0" rIns="0" bIns="0" rtlCol="0" anchor="ctr"/>
           <a:lstStyle/>
           <a:p>
-            <a:pPr indent="0" marL="0">
+            <a:pPr marL="0" indent="0">
               <a:buNone/>
             </a:pPr>
             <a:r>
@@ -5439,7 +5532,7 @@
           <a:bodyPr wrap="square" lIns="0" tIns="0" rIns="0" bIns="0" rtlCol="0" anchor="ctr"/>
           <a:lstStyle/>
           <a:p>
-            <a:pPr indent="0" marL="0">
+            <a:pPr marL="0" indent="0">
               <a:buNone/>
             </a:pPr>
             <a:r>
@@ -5478,7 +5571,7 @@
           <a:bodyPr wrap="square" lIns="0" tIns="0" rIns="0" bIns="0" rtlCol="0" anchor="ctr"/>
           <a:lstStyle/>
           <a:p>
-            <a:pPr indent="0" marL="0">
+            <a:pPr marL="0" indent="0">
               <a:buNone/>
             </a:pPr>
             <a:r>
@@ -5515,13 +5608,20 @@
           </a:solidFill>
           <a:ln/>
           <a:effectLst>
-            <a:outerShdw sx="100000" sy="100000" kx="0" ky="0" algn="bl" rotWithShape="0" blurRad="127000" dist="38100" dir="8100000">
+            <a:outerShdw blurRad="127000" dist="38100" dir="8100000" algn="bl" rotWithShape="0">
               <a:srgbClr val="000000">
                 <a:alpha val="30000"/>
               </a:srgbClr>
             </a:outerShdw>
           </a:effectLst>
         </p:spPr>
+        <p:txBody>
+          <a:bodyPr/>
+          <a:lstStyle/>
+          <a:p>
+            <a:endParaRPr lang="en-US"/>
+          </a:p>
+        </p:txBody>
       </p:sp>
       <p:sp>
         <p:nvSpPr>
@@ -5542,6 +5642,13 @@
           </a:solidFill>
           <a:ln/>
         </p:spPr>
+        <p:txBody>
+          <a:bodyPr/>
+          <a:lstStyle/>
+          <a:p>
+            <a:endParaRPr lang="en-US"/>
+          </a:p>
+        </p:txBody>
       </p:sp>
       <p:sp>
         <p:nvSpPr>
@@ -5564,7 +5671,7 @@
           <a:bodyPr wrap="square" lIns="0" tIns="0" rIns="0" bIns="0" rtlCol="0" anchor="ctr"/>
           <a:lstStyle/>
           <a:p>
-            <a:pPr algn="ctr" indent="0" marL="0">
+            <a:pPr marL="0" indent="0" algn="ctr">
               <a:buNone/>
             </a:pPr>
             <a:r>
@@ -5600,7 +5707,7 @@
           <a:bodyPr wrap="square" lIns="0" tIns="0" rIns="0" bIns="0" rtlCol="0" anchor="ctr"/>
           <a:lstStyle/>
           <a:p>
-            <a:pPr algn="ctr" indent="0" marL="0">
+            <a:pPr marL="0" indent="0" algn="ctr">
               <a:buNone/>
             </a:pPr>
             <a:r>
@@ -5639,7 +5746,7 @@
           <a:bodyPr wrap="square" lIns="0" tIns="0" rIns="0" bIns="0" rtlCol="0" anchor="ctr"/>
           <a:lstStyle/>
           <a:p>
-            <a:pPr algn="ctr" indent="0" marL="0">
+            <a:pPr marL="0" indent="0" algn="ctr">
               <a:buNone/>
             </a:pPr>
             <a:r>
@@ -5675,6 +5782,13 @@
           </a:solidFill>
           <a:ln/>
         </p:spPr>
+        <p:txBody>
+          <a:bodyPr/>
+          <a:lstStyle/>
+          <a:p>
+            <a:endParaRPr lang="en-US"/>
+          </a:p>
+        </p:txBody>
       </p:sp>
       <p:sp>
         <p:nvSpPr>
@@ -5697,7 +5811,7 @@
           <a:bodyPr wrap="square" lIns="0" tIns="0" rIns="0" bIns="0" rtlCol="0" anchor="ctr"/>
           <a:lstStyle/>
           <a:p>
-            <a:pPr algn="ctr" indent="0" marL="0">
+            <a:pPr marL="0" indent="0" algn="ctr">
               <a:buNone/>
             </a:pPr>
             <a:r>
@@ -5735,7 +5849,7 @@
           <a:bodyPr wrap="square" lIns="0" tIns="0" rIns="0" bIns="0" rtlCol="0" anchor="ctr"/>
           <a:lstStyle/>
           <a:p>
-            <a:pPr indent="0" marL="0">
+            <a:pPr marL="0" indent="0">
               <a:buNone/>
             </a:pPr>
             <a:r>
@@ -5752,7 +5866,7 @@
             <a:endParaRPr lang="en-US" sz="1300" dirty="0"/>
           </a:p>
           <a:p>
-            <a:pPr indent="0" marL="0">
+            <a:pPr marL="0" indent="0">
               <a:buNone/>
             </a:pPr>
             <a:r>
@@ -5786,6 +5900,7 @@
         <a:solidFill>
           <a:srgbClr val="0F1A2E"/>
         </a:solidFill>
+        <a:effectLst/>
       </p:bgPr>
     </p:bg>
     <p:spTree>
@@ -5821,6 +5936,13 @@
           </a:solidFill>
           <a:ln/>
         </p:spPr>
+        <p:txBody>
+          <a:bodyPr/>
+          <a:lstStyle/>
+          <a:p>
+            <a:endParaRPr lang="en-US"/>
+          </a:p>
+        </p:txBody>
       </p:sp>
       <p:sp>
         <p:nvSpPr>
@@ -5843,11 +5965,11 @@
           <a:bodyPr wrap="square" lIns="0" tIns="0" rIns="0" bIns="0" rtlCol="0" anchor="ctr"/>
           <a:lstStyle/>
           <a:p>
-            <a:pPr algn="ctr" indent="0" marL="0">
-              <a:buNone/>
-            </a:pPr>
-            <a:r>
-              <a:rPr lang="en-US" sz="800" b="1" spc="200" kern="0" dirty="0">
+            <a:pPr marL="0" indent="0" algn="ctr">
+              <a:buNone/>
+            </a:pPr>
+            <a:r>
+              <a:rPr lang="en-US" sz="800" b="1" kern="0" spc="200" dirty="0">
                 <a:solidFill>
                   <a:srgbClr val="F1F5F9"/>
                 </a:solidFill>
@@ -5879,6 +6001,13 @@
           </a:solidFill>
           <a:ln/>
         </p:spPr>
+        <p:txBody>
+          <a:bodyPr/>
+          <a:lstStyle/>
+          <a:p>
+            <a:endParaRPr lang="en-US"/>
+          </a:p>
+        </p:txBody>
       </p:sp>
       <p:sp>
         <p:nvSpPr>
@@ -5901,7 +6030,7 @@
           <a:bodyPr wrap="square" lIns="0" tIns="0" rIns="0" bIns="0" rtlCol="0" anchor="ctr"/>
           <a:lstStyle/>
           <a:p>
-            <a:pPr indent="0" marL="0">
+            <a:pPr marL="0" indent="0">
               <a:buNone/>
             </a:pPr>
             <a:r>
@@ -5918,7 +6047,7 @@
             <a:endParaRPr lang="en-US" sz="2600" dirty="0"/>
           </a:p>
           <a:p>
-            <a:pPr indent="0" marL="0">
+            <a:pPr marL="0" indent="0">
               <a:buNone/>
             </a:pPr>
             <a:r>
@@ -5955,13 +6084,20 @@
           </a:solidFill>
           <a:ln/>
           <a:effectLst>
-            <a:outerShdw sx="100000" sy="100000" kx="0" ky="0" algn="bl" rotWithShape="0" blurRad="127000" dist="38100" dir="8100000">
+            <a:outerShdw blurRad="127000" dist="38100" dir="8100000" algn="bl" rotWithShape="0">
               <a:srgbClr val="000000">
                 <a:alpha val="30000"/>
               </a:srgbClr>
             </a:outerShdw>
           </a:effectLst>
         </p:spPr>
+        <p:txBody>
+          <a:bodyPr/>
+          <a:lstStyle/>
+          <a:p>
+            <a:endParaRPr lang="en-US"/>
+          </a:p>
+        </p:txBody>
       </p:sp>
       <p:sp>
         <p:nvSpPr>
@@ -5982,6 +6118,13 @@
           </a:solidFill>
           <a:ln/>
         </p:spPr>
+        <p:txBody>
+          <a:bodyPr/>
+          <a:lstStyle/>
+          <a:p>
+            <a:endParaRPr lang="en-US"/>
+          </a:p>
+        </p:txBody>
       </p:sp>
       <p:sp>
         <p:nvSpPr>
@@ -6004,7 +6147,7 @@
           <a:bodyPr wrap="square" lIns="0" tIns="0" rIns="0" bIns="0" rtlCol="0" anchor="ctr"/>
           <a:lstStyle/>
           <a:p>
-            <a:pPr indent="0" marL="0">
+            <a:pPr marL="0" indent="0">
               <a:buNone/>
             </a:pPr>
             <a:r>
@@ -6040,7 +6183,7 @@
           <a:bodyPr wrap="square" lIns="0" tIns="0" rIns="0" bIns="0" rtlCol="0" anchor="ctr"/>
           <a:lstStyle/>
           <a:p>
-            <a:pPr indent="0" marL="0">
+            <a:pPr marL="0" indent="0">
               <a:buNone/>
             </a:pPr>
             <a:r>
@@ -6074,13 +6217,20 @@
           </a:solidFill>
           <a:ln/>
           <a:effectLst>
-            <a:outerShdw sx="100000" sy="100000" kx="0" ky="0" algn="bl" rotWithShape="0" blurRad="127000" dist="38100" dir="8100000">
+            <a:outerShdw blurRad="127000" dist="38100" dir="8100000" algn="bl" rotWithShape="0">
               <a:srgbClr val="000000">
                 <a:alpha val="30000"/>
               </a:srgbClr>
             </a:outerShdw>
           </a:effectLst>
         </p:spPr>
+        <p:txBody>
+          <a:bodyPr/>
+          <a:lstStyle/>
+          <a:p>
+            <a:endParaRPr lang="en-US"/>
+          </a:p>
+        </p:txBody>
       </p:sp>
       <p:sp>
         <p:nvSpPr>
@@ -6101,6 +6251,13 @@
           </a:solidFill>
           <a:ln/>
         </p:spPr>
+        <p:txBody>
+          <a:bodyPr/>
+          <a:lstStyle/>
+          <a:p>
+            <a:endParaRPr lang="en-US"/>
+          </a:p>
+        </p:txBody>
       </p:sp>
       <p:sp>
         <p:nvSpPr>
@@ -6123,7 +6280,7 @@
           <a:bodyPr wrap="square" lIns="0" tIns="0" rIns="0" bIns="0" rtlCol="0" anchor="ctr"/>
           <a:lstStyle/>
           <a:p>
-            <a:pPr indent="0" marL="0">
+            <a:pPr marL="0" indent="0">
               <a:buNone/>
             </a:pPr>
             <a:r>
@@ -6159,7 +6316,7 @@
           <a:bodyPr wrap="square" lIns="0" tIns="0" rIns="0" bIns="0" rtlCol="0" anchor="ctr"/>
           <a:lstStyle/>
           <a:p>
-            <a:pPr indent="0" marL="0">
+            <a:pPr marL="0" indent="0">
               <a:buNone/>
             </a:pPr>
             <a:r>
@@ -6193,13 +6350,20 @@
           </a:solidFill>
           <a:ln/>
           <a:effectLst>
-            <a:outerShdw sx="100000" sy="100000" kx="0" ky="0" algn="bl" rotWithShape="0" blurRad="127000" dist="38100" dir="8100000">
+            <a:outerShdw blurRad="127000" dist="38100" dir="8100000" algn="bl" rotWithShape="0">
               <a:srgbClr val="000000">
                 <a:alpha val="30000"/>
               </a:srgbClr>
             </a:outerShdw>
           </a:effectLst>
         </p:spPr>
+        <p:txBody>
+          <a:bodyPr/>
+          <a:lstStyle/>
+          <a:p>
+            <a:endParaRPr lang="en-US"/>
+          </a:p>
+        </p:txBody>
       </p:sp>
       <p:sp>
         <p:nvSpPr>
@@ -6220,6 +6384,13 @@
           </a:solidFill>
           <a:ln/>
         </p:spPr>
+        <p:txBody>
+          <a:bodyPr/>
+          <a:lstStyle/>
+          <a:p>
+            <a:endParaRPr lang="en-US"/>
+          </a:p>
+        </p:txBody>
       </p:sp>
       <p:sp>
         <p:nvSpPr>
@@ -6242,7 +6413,7 @@
           <a:bodyPr wrap="square" lIns="0" tIns="0" rIns="0" bIns="0" rtlCol="0" anchor="ctr"/>
           <a:lstStyle/>
           <a:p>
-            <a:pPr indent="0" marL="0">
+            <a:pPr marL="0" indent="0">
               <a:buNone/>
             </a:pPr>
             <a:r>
@@ -6278,7 +6449,7 @@
           <a:bodyPr wrap="square" lIns="0" tIns="0" rIns="0" bIns="0" rtlCol="0" anchor="ctr"/>
           <a:lstStyle/>
           <a:p>
-            <a:pPr indent="0" marL="0">
+            <a:pPr marL="0" indent="0">
               <a:buNone/>
             </a:pPr>
             <a:r>
@@ -6309,6 +6480,7 @@
         <a:solidFill>
           <a:srgbClr val="080C1A"/>
         </a:solidFill>
+        <a:effectLst/>
       </p:bgPr>
     </p:bg>
     <p:spTree>
@@ -6344,6 +6516,13 @@
           </a:solidFill>
           <a:ln/>
         </p:spPr>
+        <p:txBody>
+          <a:bodyPr/>
+          <a:lstStyle/>
+          <a:p>
+            <a:endParaRPr lang="en-US"/>
+          </a:p>
+        </p:txBody>
       </p:sp>
       <p:sp>
         <p:nvSpPr>
@@ -6366,11 +6545,11 @@
           <a:bodyPr wrap="square" lIns="0" tIns="0" rIns="0" bIns="0" rtlCol="0" anchor="ctr"/>
           <a:lstStyle/>
           <a:p>
-            <a:pPr algn="ctr" indent="0" marL="0">
-              <a:buNone/>
-            </a:pPr>
-            <a:r>
-              <a:rPr lang="en-US" sz="800" b="1" spc="200" kern="0" dirty="0">
+            <a:pPr marL="0" indent="0" algn="ctr">
+              <a:buNone/>
+            </a:pPr>
+            <a:r>
+              <a:rPr lang="en-US" sz="800" b="1" kern="0" spc="200" dirty="0">
                 <a:solidFill>
                   <a:srgbClr val="F1F5F9"/>
                 </a:solidFill>
@@ -6402,6 +6581,13 @@
           </a:solidFill>
           <a:ln/>
         </p:spPr>
+        <p:txBody>
+          <a:bodyPr/>
+          <a:lstStyle/>
+          <a:p>
+            <a:endParaRPr lang="en-US"/>
+          </a:p>
+        </p:txBody>
       </p:sp>
       <p:sp>
         <p:nvSpPr>
@@ -6424,7 +6610,7 @@
           <a:bodyPr wrap="square" lIns="0" tIns="0" rIns="0" bIns="0" rtlCol="0" anchor="ctr"/>
           <a:lstStyle/>
           <a:p>
-            <a:pPr indent="0" marL="0">
+            <a:pPr marL="0" indent="0">
               <a:buNone/>
             </a:pPr>
             <a:r>
@@ -6463,7 +6649,7 @@
           <a:bodyPr wrap="square" lIns="0" tIns="0" rIns="0" bIns="0" rtlCol="0" anchor="ctr"/>
           <a:lstStyle/>
           <a:p>
-            <a:pPr indent="0" marL="0">
+            <a:pPr marL="0" indent="0">
               <a:buNone/>
             </a:pPr>
             <a:r>
@@ -6497,13 +6683,20 @@
           </a:solidFill>
           <a:ln/>
           <a:effectLst>
-            <a:outerShdw sx="100000" sy="100000" kx="0" ky="0" algn="bl" rotWithShape="0" blurRad="127000" dist="38100" dir="8100000">
+            <a:outerShdw blurRad="127000" dist="38100" dir="8100000" algn="bl" rotWithShape="0">
               <a:srgbClr val="000000">
                 <a:alpha val="30000"/>
               </a:srgbClr>
             </a:outerShdw>
           </a:effectLst>
         </p:spPr>
+        <p:txBody>
+          <a:bodyPr/>
+          <a:lstStyle/>
+          <a:p>
+            <a:endParaRPr lang="en-US"/>
+          </a:p>
+        </p:txBody>
       </p:sp>
       <p:sp>
         <p:nvSpPr>
@@ -6524,6 +6717,13 @@
           </a:solidFill>
           <a:ln/>
         </p:spPr>
+        <p:txBody>
+          <a:bodyPr/>
+          <a:lstStyle/>
+          <a:p>
+            <a:endParaRPr lang="en-US"/>
+          </a:p>
+        </p:txBody>
       </p:sp>
       <p:sp>
         <p:nvSpPr>
@@ -6546,7 +6746,7 @@
           <a:bodyPr wrap="square" lIns="0" tIns="0" rIns="0" bIns="0" rtlCol="0" anchor="ctr"/>
           <a:lstStyle/>
           <a:p>
-            <a:pPr indent="0" marL="0">
+            <a:pPr marL="0" indent="0">
               <a:buNone/>
             </a:pPr>
             <a:r>
@@ -6582,7 +6782,7 @@
           <a:bodyPr wrap="square" lIns="0" tIns="0" rIns="0" bIns="0" rtlCol="0" anchor="ctr"/>
           <a:lstStyle/>
           <a:p>
-            <a:pPr indent="0" marL="0">
+            <a:pPr marL="0" indent="0">
               <a:buNone/>
             </a:pPr>
             <a:r>
@@ -6616,13 +6816,20 @@
           </a:solidFill>
           <a:ln/>
           <a:effectLst>
-            <a:outerShdw sx="100000" sy="100000" kx="0" ky="0" algn="bl" rotWithShape="0" blurRad="127000" dist="38100" dir="8100000">
+            <a:outerShdw blurRad="127000" dist="38100" dir="8100000" algn="bl" rotWithShape="0">
               <a:srgbClr val="000000">
                 <a:alpha val="30000"/>
               </a:srgbClr>
             </a:outerShdw>
           </a:effectLst>
         </p:spPr>
+        <p:txBody>
+          <a:bodyPr/>
+          <a:lstStyle/>
+          <a:p>
+            <a:endParaRPr lang="en-US"/>
+          </a:p>
+        </p:txBody>
       </p:sp>
       <p:sp>
         <p:nvSpPr>
@@ -6643,6 +6850,13 @@
           </a:solidFill>
           <a:ln/>
         </p:spPr>
+        <p:txBody>
+          <a:bodyPr/>
+          <a:lstStyle/>
+          <a:p>
+            <a:endParaRPr lang="en-US"/>
+          </a:p>
+        </p:txBody>
       </p:sp>
       <p:sp>
         <p:nvSpPr>
@@ -6665,7 +6879,7 @@
           <a:bodyPr wrap="square" lIns="0" tIns="0" rIns="0" bIns="0" rtlCol="0" anchor="ctr"/>
           <a:lstStyle/>
           <a:p>
-            <a:pPr indent="0" marL="0">
+            <a:pPr marL="0" indent="0">
               <a:buNone/>
             </a:pPr>
             <a:r>
@@ -6701,7 +6915,7 @@
           <a:bodyPr wrap="square" lIns="0" tIns="0" rIns="0" bIns="0" rtlCol="0" anchor="ctr"/>
           <a:lstStyle/>
           <a:p>
-            <a:pPr indent="0" marL="0">
+            <a:pPr marL="0" indent="0">
               <a:buNone/>
             </a:pPr>
             <a:r>
@@ -6735,13 +6949,20 @@
           </a:solidFill>
           <a:ln/>
           <a:effectLst>
-            <a:outerShdw sx="100000" sy="100000" kx="0" ky="0" algn="bl" rotWithShape="0" blurRad="127000" dist="38100" dir="8100000">
+            <a:outerShdw blurRad="127000" dist="38100" dir="8100000" algn="bl" rotWithShape="0">
               <a:srgbClr val="000000">
                 <a:alpha val="30000"/>
               </a:srgbClr>
             </a:outerShdw>
           </a:effectLst>
         </p:spPr>
+        <p:txBody>
+          <a:bodyPr/>
+          <a:lstStyle/>
+          <a:p>
+            <a:endParaRPr lang="en-US"/>
+          </a:p>
+        </p:txBody>
       </p:sp>
       <p:sp>
         <p:nvSpPr>
@@ -6762,6 +6983,13 @@
           </a:solidFill>
           <a:ln/>
         </p:spPr>
+        <p:txBody>
+          <a:bodyPr/>
+          <a:lstStyle/>
+          <a:p>
+            <a:endParaRPr lang="en-US"/>
+          </a:p>
+        </p:txBody>
       </p:sp>
       <p:sp>
         <p:nvSpPr>
@@ -6784,7 +7012,7 @@
           <a:bodyPr wrap="square" lIns="0" tIns="0" rIns="0" bIns="0" rtlCol="0" anchor="ctr"/>
           <a:lstStyle/>
           <a:p>
-            <a:pPr indent="0" marL="0">
+            <a:pPr marL="0" indent="0">
               <a:buNone/>
             </a:pPr>
             <a:r>
@@ -6820,7 +7048,7 @@
           <a:bodyPr wrap="square" lIns="0" tIns="0" rIns="0" bIns="0" rtlCol="0" anchor="ctr"/>
           <a:lstStyle/>
           <a:p>
-            <a:pPr indent="0" marL="0">
+            <a:pPr marL="0" indent="0">
               <a:buNone/>
             </a:pPr>
             <a:r>
@@ -6854,13 +7082,20 @@
           </a:solidFill>
           <a:ln/>
           <a:effectLst>
-            <a:outerShdw sx="100000" sy="100000" kx="0" ky="0" algn="bl" rotWithShape="0" blurRad="127000" dist="38100" dir="8100000">
+            <a:outerShdw blurRad="127000" dist="38100" dir="8100000" algn="bl" rotWithShape="0">
               <a:srgbClr val="000000">
                 <a:alpha val="30000"/>
               </a:srgbClr>
             </a:outerShdw>
           </a:effectLst>
         </p:spPr>
+        <p:txBody>
+          <a:bodyPr/>
+          <a:lstStyle/>
+          <a:p>
+            <a:endParaRPr lang="en-US"/>
+          </a:p>
+        </p:txBody>
       </p:sp>
       <p:sp>
         <p:nvSpPr>
@@ -6881,6 +7116,13 @@
           </a:solidFill>
           <a:ln/>
         </p:spPr>
+        <p:txBody>
+          <a:bodyPr/>
+          <a:lstStyle/>
+          <a:p>
+            <a:endParaRPr lang="en-US"/>
+          </a:p>
+        </p:txBody>
       </p:sp>
       <p:sp>
         <p:nvSpPr>
@@ -6903,7 +7145,7 @@
           <a:bodyPr wrap="square" lIns="0" tIns="0" rIns="0" bIns="0" rtlCol="0" anchor="ctr"/>
           <a:lstStyle/>
           <a:p>
-            <a:pPr indent="0" marL="0">
+            <a:pPr marL="0" indent="0">
               <a:buNone/>
             </a:pPr>
             <a:r>
@@ -6939,7 +7181,7 @@
           <a:bodyPr wrap="square" lIns="0" tIns="0" rIns="0" bIns="0" rtlCol="0" anchor="ctr"/>
           <a:lstStyle/>
           <a:p>
-            <a:pPr indent="0" marL="0">
+            <a:pPr marL="0" indent="0">
               <a:buNone/>
             </a:pPr>
             <a:r>
@@ -6970,6 +7212,7 @@
         <a:solidFill>
           <a:srgbClr val="0F1A2E"/>
         </a:solidFill>
+        <a:effectLst/>
       </p:bgPr>
     </p:bg>
     <p:spTree>
@@ -7005,6 +7248,13 @@
           </a:solidFill>
           <a:ln/>
         </p:spPr>
+        <p:txBody>
+          <a:bodyPr/>
+          <a:lstStyle/>
+          <a:p>
+            <a:endParaRPr lang="en-US"/>
+          </a:p>
+        </p:txBody>
       </p:sp>
       <p:sp>
         <p:nvSpPr>
@@ -7027,11 +7277,11 @@
           <a:bodyPr wrap="square" lIns="0" tIns="0" rIns="0" bIns="0" rtlCol="0" anchor="ctr"/>
           <a:lstStyle/>
           <a:p>
-            <a:pPr algn="ctr" indent="0" marL="0">
-              <a:buNone/>
-            </a:pPr>
-            <a:r>
-              <a:rPr lang="en-US" sz="800" b="1" spc="200" kern="0" dirty="0">
+            <a:pPr marL="0" indent="0" algn="ctr">
+              <a:buNone/>
+            </a:pPr>
+            <a:r>
+              <a:rPr lang="en-US" sz="800" b="1" kern="0" spc="200" dirty="0">
                 <a:solidFill>
                   <a:srgbClr val="F1F5F9"/>
                 </a:solidFill>
@@ -7063,6 +7313,13 @@
           </a:solidFill>
           <a:ln/>
         </p:spPr>
+        <p:txBody>
+          <a:bodyPr/>
+          <a:lstStyle/>
+          <a:p>
+            <a:endParaRPr lang="en-US"/>
+          </a:p>
+        </p:txBody>
       </p:sp>
       <p:sp>
         <p:nvSpPr>
@@ -7085,7 +7342,7 @@
           <a:bodyPr wrap="square" lIns="0" tIns="0" rIns="0" bIns="0" rtlCol="0" anchor="ctr"/>
           <a:lstStyle/>
           <a:p>
-            <a:pPr indent="0" marL="0">
+            <a:pPr marL="0" indent="0">
               <a:buNone/>
             </a:pPr>
             <a:r>
@@ -7122,6 +7379,13 @@
           </a:solidFill>
           <a:ln/>
         </p:spPr>
+        <p:txBody>
+          <a:bodyPr/>
+          <a:lstStyle/>
+          <a:p>
+            <a:endParaRPr lang="en-US"/>
+          </a:p>
+        </p:txBody>
       </p:sp>
       <p:sp>
         <p:nvSpPr>
@@ -7144,7 +7408,7 @@
           <a:bodyPr wrap="square" lIns="0" tIns="0" rIns="0" bIns="0" rtlCol="0" anchor="ctr"/>
           <a:lstStyle/>
           <a:p>
-            <a:pPr algn="ctr" indent="0" marL="0">
+            <a:pPr marL="0" indent="0" algn="ctr">
               <a:buNone/>
             </a:pPr>
             <a:r>
@@ -7167,7 +7431,7 @@
         </p:nvSpPr>
         <p:spPr>
           <a:xfrm>
-            <a:off x="1097280" y="1581912"/>
+            <a:off x="1097280" y="1532148"/>
             <a:ext cx="3108960" cy="347472"/>
           </a:xfrm>
           <a:prstGeom prst="rect">
@@ -7178,6 +7442,13 @@
           </a:solidFill>
           <a:ln/>
         </p:spPr>
+        <p:txBody>
+          <a:bodyPr/>
+          <a:lstStyle/>
+          <a:p>
+            <a:endParaRPr lang="en-US"/>
+          </a:p>
+        </p:txBody>
       </p:sp>
       <p:sp>
         <p:nvSpPr>
@@ -7187,7 +7458,7 @@
         </p:nvSpPr>
         <p:spPr>
           <a:xfrm>
-            <a:off x="1097280" y="1581912"/>
+            <a:off x="1097280" y="1532148"/>
             <a:ext cx="3108960" cy="347472"/>
           </a:xfrm>
           <a:prstGeom prst="rect">
@@ -7200,7 +7471,7 @@
           <a:bodyPr wrap="square" lIns="50800" tIns="50800" rIns="50800" bIns="50800" rtlCol="0" anchor="ctr"/>
           <a:lstStyle/>
           <a:p>
-            <a:pPr indent="0" marL="0">
+            <a:pPr marL="0" indent="0">
               <a:buNone/>
             </a:pPr>
             <a:r>
@@ -7212,7 +7483,7 @@
                 <a:ea typeface="Consolas" pitchFamily="34" charset="-122"/>
                 <a:cs typeface="Consolas" pitchFamily="34" charset="-120"/>
               </a:rPr>
-              <a:t>reckon memoir src/</a:t>
+              <a:t>reckon memoir &lt;path&gt; [--auto]</a:t>
             </a:r>
             <a:endParaRPr lang="en-US" sz="1100" dirty="0"/>
           </a:p>
@@ -7226,7 +7497,7 @@
         </p:nvSpPr>
         <p:spPr>
           <a:xfrm>
-            <a:off x="4343400" y="1554480"/>
+            <a:off x="4343400" y="1481328"/>
             <a:ext cx="2286000" cy="320040"/>
           </a:xfrm>
           <a:prstGeom prst="rect">
@@ -7239,7 +7510,7 @@
           <a:bodyPr wrap="square" lIns="0" tIns="0" rIns="0" bIns="0" rtlCol="0" anchor="ctr"/>
           <a:lstStyle/>
           <a:p>
-            <a:pPr indent="0" marL="0">
+            <a:pPr marL="0" indent="0">
               <a:buNone/>
             </a:pPr>
             <a:r>
@@ -7262,7 +7533,7 @@
         </p:nvSpPr>
         <p:spPr>
           <a:xfrm>
-            <a:off x="4343400" y="1856232"/>
+            <a:off x="4343400" y="1783080"/>
             <a:ext cx="4572000" cy="640080"/>
           </a:xfrm>
           <a:prstGeom prst="rect">
@@ -7275,7 +7546,7 @@
           <a:bodyPr wrap="square" lIns="0" tIns="0" rIns="0" bIns="0" rtlCol="0" anchor="ctr"/>
           <a:lstStyle/>
           <a:p>
-            <a:pPr indent="0" marL="0">
+            <a:pPr marL="0" indent="0">
               <a:buNone/>
             </a:pPr>
             <a:r>
@@ -7309,6 +7580,13 @@
           </a:solidFill>
           <a:ln/>
         </p:spPr>
+        <p:txBody>
+          <a:bodyPr/>
+          <a:lstStyle/>
+          <a:p>
+            <a:endParaRPr lang="en-US"/>
+          </a:p>
+        </p:txBody>
       </p:sp>
       <p:sp>
         <p:nvSpPr>
@@ -7331,7 +7609,7 @@
           <a:bodyPr wrap="square" lIns="0" tIns="0" rIns="0" bIns="0" rtlCol="0" anchor="ctr"/>
           <a:lstStyle/>
           <a:p>
-            <a:pPr algn="ctr" indent="0" marL="0">
+            <a:pPr marL="0" indent="0" algn="ctr">
               <a:buNone/>
             </a:pPr>
             <a:r>
@@ -7354,7 +7632,7 @@
         </p:nvSpPr>
         <p:spPr>
           <a:xfrm>
-            <a:off x="1097280" y="2679192"/>
+            <a:off x="1097280" y="2592324"/>
             <a:ext cx="3108960" cy="347472"/>
           </a:xfrm>
           <a:prstGeom prst="rect">
@@ -7365,6 +7643,13 @@
           </a:solidFill>
           <a:ln/>
         </p:spPr>
+        <p:txBody>
+          <a:bodyPr/>
+          <a:lstStyle/>
+          <a:p>
+            <a:endParaRPr lang="en-US"/>
+          </a:p>
+        </p:txBody>
       </p:sp>
       <p:sp>
         <p:nvSpPr>
@@ -7374,7 +7659,7 @@
         </p:nvSpPr>
         <p:spPr>
           <a:xfrm>
-            <a:off x="1097280" y="2679192"/>
+            <a:off x="1097280" y="2592324"/>
             <a:ext cx="3108960" cy="347472"/>
           </a:xfrm>
           <a:prstGeom prst="rect">
@@ -7387,7 +7672,7 @@
           <a:bodyPr wrap="square" lIns="50800" tIns="50800" rIns="50800" bIns="50800" rtlCol="0" anchor="ctr"/>
           <a:lstStyle/>
           <a:p>
-            <a:pPr indent="0" marL="0">
+            <a:pPr marL="0" indent="0">
               <a:buNone/>
             </a:pPr>
             <a:r>
@@ -7399,7 +7684,7 @@
                 <a:ea typeface="Consolas" pitchFamily="34" charset="-122"/>
                 <a:cs typeface="Consolas" pitchFamily="34" charset="-120"/>
               </a:rPr>
-              <a:t>reckon why payments/retry.py:27-28</a:t>
+              <a:t>reckon why &lt;path&gt;:&lt;line[-end]&gt;</a:t>
             </a:r>
             <a:endParaRPr lang="en-US" sz="1100" dirty="0"/>
           </a:p>
@@ -7413,7 +7698,7 @@
         </p:nvSpPr>
         <p:spPr>
           <a:xfrm>
-            <a:off x="4343400" y="2651760"/>
+            <a:off x="4343400" y="2578608"/>
             <a:ext cx="2286000" cy="320040"/>
           </a:xfrm>
           <a:prstGeom prst="rect">
@@ -7426,7 +7711,7 @@
           <a:bodyPr wrap="square" lIns="0" tIns="0" rIns="0" bIns="0" rtlCol="0" anchor="ctr"/>
           <a:lstStyle/>
           <a:p>
-            <a:pPr indent="0" marL="0">
+            <a:pPr marL="0" indent="0">
               <a:buNone/>
             </a:pPr>
             <a:r>
@@ -7449,7 +7734,7 @@
         </p:nvSpPr>
         <p:spPr>
           <a:xfrm>
-            <a:off x="4343400" y="2953512"/>
+            <a:off x="4343400" y="2880360"/>
             <a:ext cx="4572000" cy="640080"/>
           </a:xfrm>
           <a:prstGeom prst="rect">
@@ -7462,7 +7747,7 @@
           <a:bodyPr wrap="square" lIns="0" tIns="0" rIns="0" bIns="0" rtlCol="0" anchor="ctr"/>
           <a:lstStyle/>
           <a:p>
-            <a:pPr indent="0" marL="0">
+            <a:pPr marL="0" indent="0">
               <a:buNone/>
             </a:pPr>
             <a:r>
@@ -7496,6 +7781,13 @@
           </a:solidFill>
           <a:ln/>
         </p:spPr>
+        <p:txBody>
+          <a:bodyPr/>
+          <a:lstStyle/>
+          <a:p>
+            <a:endParaRPr lang="en-US"/>
+          </a:p>
+        </p:txBody>
       </p:sp>
       <p:sp>
         <p:nvSpPr>
@@ -7518,7 +7810,7 @@
           <a:bodyPr wrap="square" lIns="0" tIns="0" rIns="0" bIns="0" rtlCol="0" anchor="ctr"/>
           <a:lstStyle/>
           <a:p>
-            <a:pPr algn="ctr" indent="0" marL="0">
+            <a:pPr marL="0" indent="0" algn="ctr">
               <a:buNone/>
             </a:pPr>
             <a:r>
@@ -7541,7 +7833,7 @@
         </p:nvSpPr>
         <p:spPr>
           <a:xfrm>
-            <a:off x="1097280" y="3776472"/>
+            <a:off x="1097280" y="3747868"/>
             <a:ext cx="3108960" cy="347472"/>
           </a:xfrm>
           <a:prstGeom prst="rect">
@@ -7552,6 +7844,13 @@
           </a:solidFill>
           <a:ln/>
         </p:spPr>
+        <p:txBody>
+          <a:bodyPr/>
+          <a:lstStyle/>
+          <a:p>
+            <a:endParaRPr lang="en-US"/>
+          </a:p>
+        </p:txBody>
       </p:sp>
       <p:sp>
         <p:nvSpPr>
@@ -7561,7 +7860,7 @@
         </p:nvSpPr>
         <p:spPr>
           <a:xfrm>
-            <a:off x="1097280" y="3776472"/>
+            <a:off x="1097280" y="3747868"/>
             <a:ext cx="3108960" cy="347472"/>
           </a:xfrm>
           <a:prstGeom prst="rect">
@@ -7574,7 +7873,7 @@
           <a:bodyPr wrap="square" lIns="50800" tIns="50800" rIns="50800" bIns="50800" rtlCol="0" anchor="ctr"/>
           <a:lstStyle/>
           <a:p>
-            <a:pPr indent="0" marL="0">
+            <a:pPr marL="0" indent="0">
               <a:buNone/>
             </a:pPr>
             <a:r>
@@ -7586,79 +7885,313 @@
                 <a:ea typeface="Consolas" pitchFamily="34" charset="-122"/>
                 <a:cs typeface="Consolas" pitchFamily="34" charset="-120"/>
               </a:rPr>
+              <a:t>reckon check [--diff &lt;file&gt;] [--ci]</a:t>
+            </a:r>
+            <a:endParaRPr lang="en-US" sz="1100" dirty="0"/>
+          </a:p>
+        </p:txBody>
+      </p:sp>
+      <p:sp>
+        <p:nvSpPr>
+          <p:cNvPr id="22" name="Text 20"/>
+          <p:cNvSpPr/>
+          <p:nvPr/>
+        </p:nvSpPr>
+        <p:spPr>
+          <a:xfrm>
+            <a:off x="4343400" y="3675888"/>
+            <a:ext cx="2286000" cy="320040"/>
+          </a:xfrm>
+          <a:prstGeom prst="rect">
+            <a:avLst/>
+          </a:prstGeom>
+          <a:noFill/>
+          <a:ln/>
+        </p:spPr>
+        <p:txBody>
+          <a:bodyPr wrap="square" lIns="0" tIns="0" rIns="0" bIns="0" rtlCol="0" anchor="ctr"/>
+          <a:lstStyle/>
+          <a:p>
+            <a:pPr marL="0" indent="0">
+              <a:buNone/>
+            </a:pPr>
+            <a:r>
+              <a:rPr lang="en-US" sz="1300" b="1" dirty="0">
+                <a:solidFill>
+                  <a:srgbClr val="F1F5F9"/>
+                </a:solidFill>
+              </a:rPr>
+              <a:t>Block Regressions</a:t>
+            </a:r>
+            <a:endParaRPr lang="en-US" sz="1300" dirty="0"/>
+          </a:p>
+        </p:txBody>
+      </p:sp>
+      <p:sp>
+        <p:nvSpPr>
+          <p:cNvPr id="23" name="Text 21"/>
+          <p:cNvSpPr/>
+          <p:nvPr/>
+        </p:nvSpPr>
+        <p:spPr>
+          <a:xfrm>
+            <a:off x="4343400" y="3977640"/>
+            <a:ext cx="4572000" cy="640080"/>
+          </a:xfrm>
+          <a:prstGeom prst="rect">
+            <a:avLst/>
+          </a:prstGeom>
+          <a:noFill/>
+          <a:ln/>
+        </p:spPr>
+        <p:txBody>
+          <a:bodyPr wrap="square" lIns="0" tIns="0" rIns="0" bIns="0" rtlCol="0" anchor="ctr"/>
+          <a:lstStyle/>
+          <a:p>
+            <a:pPr marL="0" indent="0">
+              <a:buNone/>
+            </a:pPr>
+            <a:r>
+              <a:rPr lang="en-US" sz="1100" dirty="0">
+                <a:solidFill>
+                  <a:srgbClr val="94A3B8"/>
+                </a:solidFill>
+              </a:rPr>
+              <a:t>Matches the staged diff against the tripwire registry. If a change touches a guarded region, Reckon fires a warning before the commit ships.</a:t>
+            </a:r>
+            <a:endParaRPr lang="en-US" sz="1100" dirty="0"/>
+          </a:p>
+        </p:txBody>
+      </p:sp>
+      <p:sp>
+        <p:nvSpPr>
+          <p:cNvPr id="24" name="Shape 12">
+            <a:extLst>
+              <a:ext uri="{FF2B5EF4-FFF2-40B4-BE49-F238E27FC236}">
+                <a16:creationId xmlns:a16="http://schemas.microsoft.com/office/drawing/2014/main" id="{CB3C8221-A023-6D89-1D64-5FDCD30E4D16}"/>
+              </a:ext>
+            </a:extLst>
+          </p:cNvPr>
+          <p:cNvSpPr/>
+          <p:nvPr/>
+        </p:nvSpPr>
+        <p:spPr>
+          <a:xfrm>
+            <a:off x="1097280" y="2967228"/>
+            <a:ext cx="3108960" cy="347472"/>
+          </a:xfrm>
+          <a:prstGeom prst="rect">
+            <a:avLst/>
+          </a:prstGeom>
+          <a:solidFill>
+            <a:srgbClr val="0A0E1A"/>
+          </a:solidFill>
+          <a:ln/>
+        </p:spPr>
+        <p:txBody>
+          <a:bodyPr/>
+          <a:lstStyle/>
+          <a:p>
+            <a:endParaRPr lang="en-US"/>
+          </a:p>
+        </p:txBody>
+      </p:sp>
+      <p:sp>
+        <p:nvSpPr>
+          <p:cNvPr id="25" name="Text 13">
+            <a:extLst>
+              <a:ext uri="{FF2B5EF4-FFF2-40B4-BE49-F238E27FC236}">
+                <a16:creationId xmlns:a16="http://schemas.microsoft.com/office/drawing/2014/main" id="{FD47DFC2-E68D-39CD-47A7-E97EAEF57A00}"/>
+              </a:ext>
+            </a:extLst>
+          </p:cNvPr>
+          <p:cNvSpPr/>
+          <p:nvPr/>
+        </p:nvSpPr>
+        <p:spPr>
+          <a:xfrm>
+            <a:off x="1097280" y="2967228"/>
+            <a:ext cx="3108960" cy="347472"/>
+          </a:xfrm>
+          <a:prstGeom prst="rect">
+            <a:avLst/>
+          </a:prstGeom>
+          <a:noFill/>
+          <a:ln/>
+        </p:spPr>
+        <p:txBody>
+          <a:bodyPr wrap="square" lIns="50800" tIns="50800" rIns="50800" bIns="50800" rtlCol="0" anchor="ctr"/>
+          <a:lstStyle/>
+          <a:p>
+            <a:pPr marL="0" indent="0">
+              <a:buNone/>
+            </a:pPr>
+            <a:r>
+              <a:rPr lang="en-US" sz="1100" dirty="0">
+                <a:solidFill>
+                  <a:srgbClr val="10B981"/>
+                </a:solidFill>
+                <a:latin typeface="Consolas" pitchFamily="34" charset="0"/>
+                <a:ea typeface="Consolas" pitchFamily="34" charset="-122"/>
+                <a:cs typeface="Consolas" pitchFamily="34" charset="-120"/>
+              </a:rPr>
+              <a:t>reckon why payments/retry.py:27-28</a:t>
+            </a:r>
+            <a:endParaRPr lang="en-US" sz="1100" dirty="0"/>
+          </a:p>
+        </p:txBody>
+      </p:sp>
+      <p:sp>
+        <p:nvSpPr>
+          <p:cNvPr id="26" name="Shape 6">
+            <a:extLst>
+              <a:ext uri="{FF2B5EF4-FFF2-40B4-BE49-F238E27FC236}">
+                <a16:creationId xmlns:a16="http://schemas.microsoft.com/office/drawing/2014/main" id="{67DECCE4-230C-3BB7-5120-5845080638F4}"/>
+              </a:ext>
+            </a:extLst>
+          </p:cNvPr>
+          <p:cNvSpPr/>
+          <p:nvPr/>
+        </p:nvSpPr>
+        <p:spPr>
+          <a:xfrm>
+            <a:off x="1097280" y="1921940"/>
+            <a:ext cx="3108960" cy="347472"/>
+          </a:xfrm>
+          <a:prstGeom prst="rect">
+            <a:avLst/>
+          </a:prstGeom>
+          <a:solidFill>
+            <a:srgbClr val="0A0E1A"/>
+          </a:solidFill>
+          <a:ln/>
+        </p:spPr>
+        <p:txBody>
+          <a:bodyPr/>
+          <a:lstStyle/>
+          <a:p>
+            <a:endParaRPr lang="en-US"/>
+          </a:p>
+        </p:txBody>
+      </p:sp>
+      <p:sp>
+        <p:nvSpPr>
+          <p:cNvPr id="27" name="Text 7">
+            <a:extLst>
+              <a:ext uri="{FF2B5EF4-FFF2-40B4-BE49-F238E27FC236}">
+                <a16:creationId xmlns:a16="http://schemas.microsoft.com/office/drawing/2014/main" id="{CC0D296A-8A30-8159-5D9B-269FBF7E9DC8}"/>
+              </a:ext>
+            </a:extLst>
+          </p:cNvPr>
+          <p:cNvSpPr/>
+          <p:nvPr/>
+        </p:nvSpPr>
+        <p:spPr>
+          <a:xfrm>
+            <a:off x="1097280" y="1921940"/>
+            <a:ext cx="3108960" cy="347472"/>
+          </a:xfrm>
+          <a:prstGeom prst="rect">
+            <a:avLst/>
+          </a:prstGeom>
+          <a:noFill/>
+          <a:ln/>
+        </p:spPr>
+        <p:txBody>
+          <a:bodyPr wrap="square" lIns="50800" tIns="50800" rIns="50800" bIns="50800" rtlCol="0" anchor="ctr"/>
+          <a:lstStyle/>
+          <a:p>
+            <a:pPr marL="0" indent="0">
+              <a:buNone/>
+            </a:pPr>
+            <a:r>
+              <a:rPr lang="en-US" sz="1100" dirty="0">
+                <a:solidFill>
+                  <a:srgbClr val="10B981"/>
+                </a:solidFill>
+                <a:latin typeface="Consolas" pitchFamily="34" charset="0"/>
+                <a:ea typeface="Consolas" pitchFamily="34" charset="-122"/>
+                <a:cs typeface="Consolas" pitchFamily="34" charset="-120"/>
+              </a:rPr>
+              <a:t>reckon memoir src/</a:t>
+            </a:r>
+            <a:endParaRPr lang="en-US" sz="1100" dirty="0"/>
+          </a:p>
+        </p:txBody>
+      </p:sp>
+      <p:sp>
+        <p:nvSpPr>
+          <p:cNvPr id="28" name="Shape 18">
+            <a:extLst>
+              <a:ext uri="{FF2B5EF4-FFF2-40B4-BE49-F238E27FC236}">
+                <a16:creationId xmlns:a16="http://schemas.microsoft.com/office/drawing/2014/main" id="{1FD89912-3093-EA64-4960-76A78F036CE3}"/>
+              </a:ext>
+            </a:extLst>
+          </p:cNvPr>
+          <p:cNvSpPr/>
+          <p:nvPr/>
+        </p:nvSpPr>
+        <p:spPr>
+          <a:xfrm>
+            <a:off x="1097280" y="4137660"/>
+            <a:ext cx="3108960" cy="347472"/>
+          </a:xfrm>
+          <a:prstGeom prst="rect">
+            <a:avLst/>
+          </a:prstGeom>
+          <a:solidFill>
+            <a:srgbClr val="0A0E1A"/>
+          </a:solidFill>
+          <a:ln/>
+        </p:spPr>
+        <p:txBody>
+          <a:bodyPr/>
+          <a:lstStyle/>
+          <a:p>
+            <a:endParaRPr lang="en-US"/>
+          </a:p>
+        </p:txBody>
+      </p:sp>
+      <p:sp>
+        <p:nvSpPr>
+          <p:cNvPr id="29" name="Text 19">
+            <a:extLst>
+              <a:ext uri="{FF2B5EF4-FFF2-40B4-BE49-F238E27FC236}">
+                <a16:creationId xmlns:a16="http://schemas.microsoft.com/office/drawing/2014/main" id="{158B583E-D19C-813A-0EEE-5665CCCA7E2B}"/>
+              </a:ext>
+            </a:extLst>
+          </p:cNvPr>
+          <p:cNvSpPr/>
+          <p:nvPr/>
+        </p:nvSpPr>
+        <p:spPr>
+          <a:xfrm>
+            <a:off x="1097280" y="4137660"/>
+            <a:ext cx="3108960" cy="347472"/>
+          </a:xfrm>
+          <a:prstGeom prst="rect">
+            <a:avLst/>
+          </a:prstGeom>
+          <a:noFill/>
+          <a:ln/>
+        </p:spPr>
+        <p:txBody>
+          <a:bodyPr wrap="square" lIns="50800" tIns="50800" rIns="50800" bIns="50800" rtlCol="0" anchor="ctr"/>
+          <a:lstStyle/>
+          <a:p>
+            <a:pPr marL="0" indent="0">
+              <a:buNone/>
+            </a:pPr>
+            <a:r>
+              <a:rPr lang="en-US" sz="1100" dirty="0">
+                <a:solidFill>
+                  <a:srgbClr val="10B981"/>
+                </a:solidFill>
+                <a:latin typeface="Consolas" pitchFamily="34" charset="0"/>
+                <a:ea typeface="Consolas" pitchFamily="34" charset="-122"/>
+                <a:cs typeface="Consolas" pitchFamily="34" charset="-120"/>
+              </a:rPr>
               <a:t>reckon check</a:t>
-            </a:r>
-            <a:endParaRPr lang="en-US" sz="1100" dirty="0"/>
-          </a:p>
-        </p:txBody>
-      </p:sp>
-      <p:sp>
-        <p:nvSpPr>
-          <p:cNvPr id="22" name="Text 20"/>
-          <p:cNvSpPr/>
-          <p:nvPr/>
-        </p:nvSpPr>
-        <p:spPr>
-          <a:xfrm>
-            <a:off x="4343400" y="3749040"/>
-            <a:ext cx="2286000" cy="320040"/>
-          </a:xfrm>
-          <a:prstGeom prst="rect">
-            <a:avLst/>
-          </a:prstGeom>
-          <a:noFill/>
-          <a:ln/>
-        </p:spPr>
-        <p:txBody>
-          <a:bodyPr wrap="square" lIns="0" tIns="0" rIns="0" bIns="0" rtlCol="0" anchor="ctr"/>
-          <a:lstStyle/>
-          <a:p>
-            <a:pPr indent="0" marL="0">
-              <a:buNone/>
-            </a:pPr>
-            <a:r>
-              <a:rPr lang="en-US" sz="1300" b="1" dirty="0">
-                <a:solidFill>
-                  <a:srgbClr val="F1F5F9"/>
-                </a:solidFill>
-              </a:rPr>
-              <a:t>Block Regressions</a:t>
-            </a:r>
-            <a:endParaRPr lang="en-US" sz="1300" dirty="0"/>
-          </a:p>
-        </p:txBody>
-      </p:sp>
-      <p:sp>
-        <p:nvSpPr>
-          <p:cNvPr id="23" name="Text 21"/>
-          <p:cNvSpPr/>
-          <p:nvPr/>
-        </p:nvSpPr>
-        <p:spPr>
-          <a:xfrm>
-            <a:off x="4343400" y="4050792"/>
-            <a:ext cx="4572000" cy="640080"/>
-          </a:xfrm>
-          <a:prstGeom prst="rect">
-            <a:avLst/>
-          </a:prstGeom>
-          <a:noFill/>
-          <a:ln/>
-        </p:spPr>
-        <p:txBody>
-          <a:bodyPr wrap="square" lIns="0" tIns="0" rIns="0" bIns="0" rtlCol="0" anchor="ctr"/>
-          <a:lstStyle/>
-          <a:p>
-            <a:pPr indent="0" marL="0">
-              <a:buNone/>
-            </a:pPr>
-            <a:r>
-              <a:rPr lang="en-US" sz="1100" dirty="0">
-                <a:solidFill>
-                  <a:srgbClr val="94A3B8"/>
-                </a:solidFill>
-              </a:rPr>
-              <a:t>Matches the staged diff against the tripwire registry. If a change touches a guarded region, Reckon fires a warning before the commit ships.</a:t>
             </a:r>
             <a:endParaRPr lang="en-US" sz="1100" dirty="0"/>
           </a:p>
@@ -7680,6 +8213,7 @@
         <a:solidFill>
           <a:srgbClr val="080C1A"/>
         </a:solidFill>
+        <a:effectLst/>
       </p:bgPr>
     </p:bg>
     <p:spTree>
@@ -7715,6 +8249,13 @@
           </a:solidFill>
           <a:ln/>
         </p:spPr>
+        <p:txBody>
+          <a:bodyPr/>
+          <a:lstStyle/>
+          <a:p>
+            <a:endParaRPr lang="en-US"/>
+          </a:p>
+        </p:txBody>
       </p:sp>
       <p:sp>
         <p:nvSpPr>
@@ -7737,11 +8278,11 @@
           <a:bodyPr wrap="square" lIns="0" tIns="0" rIns="0" bIns="0" rtlCol="0" anchor="ctr"/>
           <a:lstStyle/>
           <a:p>
-            <a:pPr algn="ctr" indent="0" marL="0">
-              <a:buNone/>
-            </a:pPr>
-            <a:r>
-              <a:rPr lang="en-US" sz="800" b="1" spc="200" kern="0" dirty="0">
+            <a:pPr marL="0" indent="0" algn="ctr">
+              <a:buNone/>
+            </a:pPr>
+            <a:r>
+              <a:rPr lang="en-US" sz="800" b="1" kern="0" spc="200" dirty="0">
                 <a:solidFill>
                   <a:srgbClr val="F1F5F9"/>
                 </a:solidFill>
@@ -7773,6 +8314,13 @@
           </a:solidFill>
           <a:ln/>
         </p:spPr>
+        <p:txBody>
+          <a:bodyPr/>
+          <a:lstStyle/>
+          <a:p>
+            <a:endParaRPr lang="en-US"/>
+          </a:p>
+        </p:txBody>
       </p:sp>
       <p:sp>
         <p:nvSpPr>
@@ -7795,7 +8343,7 @@
           <a:bodyPr wrap="square" lIns="0" tIns="0" rIns="0" bIns="0" rtlCol="0" anchor="ctr"/>
           <a:lstStyle/>
           <a:p>
-            <a:pPr indent="0" marL="0">
+            <a:pPr marL="0" indent="0">
               <a:buNone/>
             </a:pPr>
             <a:r>
@@ -7807,7 +8355,7 @@
                 <a:ea typeface="Calibri" pitchFamily="34" charset="-122"/>
                 <a:cs typeface="Calibri" pitchFamily="34" charset="-120"/>
               </a:rPr>
-              <a:t>The hero: reckon check fires the tripwire</a:t>
+              <a:t>Live in IBM Bob — reckon.explain answers why this code exists</a:t>
             </a:r>
             <a:endParaRPr lang="en-US" sz="2200" dirty="0"/>
           </a:p>
@@ -7815,547 +8363,97 @@
       </p:sp>
       <p:sp>
         <p:nvSpPr>
-          <p:cNvPr id="6" name="Shape 4"/>
-          <p:cNvSpPr/>
-          <p:nvPr/>
-        </p:nvSpPr>
-        <p:spPr>
-          <a:xfrm>
-            <a:off x="457200" y="1371600"/>
-            <a:ext cx="8229600" cy="320040"/>
-          </a:xfrm>
-          <a:prstGeom prst="rect">
-            <a:avLst/>
-          </a:prstGeom>
-          <a:solidFill>
-            <a:srgbClr val="1A1A2E"/>
-          </a:solidFill>
-          <a:ln/>
-        </p:spPr>
-      </p:sp>
-      <p:sp>
-        <p:nvSpPr>
-          <p:cNvPr id="7" name="Shape 5"/>
-          <p:cNvSpPr/>
-          <p:nvPr/>
-        </p:nvSpPr>
-        <p:spPr>
-          <a:xfrm>
-            <a:off x="640080" y="1463040"/>
-            <a:ext cx="128016" cy="128016"/>
-          </a:xfrm>
-          <a:prstGeom prst="ellipse">
-            <a:avLst/>
-          </a:prstGeom>
-          <a:solidFill>
-            <a:srgbClr val="FF5F57"/>
-          </a:solidFill>
-          <a:ln/>
-        </p:spPr>
-      </p:sp>
-      <p:sp>
-        <p:nvSpPr>
-          <p:cNvPr id="8" name="Shape 6"/>
-          <p:cNvSpPr/>
-          <p:nvPr/>
-        </p:nvSpPr>
-        <p:spPr>
-          <a:xfrm>
-            <a:off x="841248" y="1463040"/>
-            <a:ext cx="128016" cy="128016"/>
-          </a:xfrm>
-          <a:prstGeom prst="ellipse">
-            <a:avLst/>
-          </a:prstGeom>
-          <a:solidFill>
-            <a:srgbClr val="FEBC2E"/>
-          </a:solidFill>
-          <a:ln/>
-        </p:spPr>
-      </p:sp>
-      <p:sp>
-        <p:nvSpPr>
-          <p:cNvPr id="9" name="Shape 7"/>
-          <p:cNvSpPr/>
-          <p:nvPr/>
-        </p:nvSpPr>
-        <p:spPr>
-          <a:xfrm>
-            <a:off x="1042416" y="1463040"/>
-            <a:ext cx="128016" cy="128016"/>
-          </a:xfrm>
-          <a:prstGeom prst="ellipse">
-            <a:avLst/>
-          </a:prstGeom>
-          <a:solidFill>
-            <a:srgbClr val="28C840"/>
-          </a:solidFill>
-          <a:ln/>
-        </p:spPr>
-      </p:sp>
-      <p:sp>
-        <p:nvSpPr>
-          <p:cNvPr id="10" name="Text 8"/>
-          <p:cNvSpPr/>
-          <p:nvPr/>
-        </p:nvSpPr>
-        <p:spPr>
-          <a:xfrm>
-            <a:off x="1280160" y="1435608"/>
-            <a:ext cx="3657600" cy="182880"/>
-          </a:xfrm>
-          <a:prstGeom prst="rect">
-            <a:avLst/>
-          </a:prstGeom>
-          <a:noFill/>
-          <a:ln/>
-        </p:spPr>
-        <p:txBody>
-          <a:bodyPr wrap="square" lIns="0" tIns="0" rIns="0" bIns="0" rtlCol="0" anchor="ctr"/>
-          <a:lstStyle/>
-          <a:p>
-            <a:pPr indent="0" marL="0">
-              <a:buNone/>
-            </a:pPr>
-            <a:r>
-              <a:rPr lang="en-US" sz="900" dirty="0">
+          <p:cNvPr id="7" name="Shape 4"/>
+          <p:cNvSpPr/>
+          <p:nvPr/>
+        </p:nvSpPr>
+        <p:spPr>
+          <a:xfrm>
+            <a:off x="457200" y="4736592"/>
+            <a:ext cx="8229600" cy="228600"/>
+          </a:xfrm>
+          <a:prstGeom prst="rect">
+            <a:avLst/>
+          </a:prstGeom>
+          <a:solidFill>
+            <a:srgbClr val="131E35"/>
+          </a:solidFill>
+          <a:ln/>
+        </p:spPr>
+        <p:txBody>
+          <a:bodyPr/>
+          <a:lstStyle/>
+          <a:p>
+            <a:endParaRPr lang="en-US"/>
+          </a:p>
+        </p:txBody>
+      </p:sp>
+      <p:sp>
+        <p:nvSpPr>
+          <p:cNvPr id="8" name="Text 5"/>
+          <p:cNvSpPr/>
+          <p:nvPr/>
+        </p:nvSpPr>
+        <p:spPr>
+          <a:xfrm>
+            <a:off x="457200" y="4736592"/>
+            <a:ext cx="8229600" cy="228600"/>
+          </a:xfrm>
+          <a:prstGeom prst="rect">
+            <a:avLst/>
+          </a:prstGeom>
+          <a:noFill/>
+          <a:ln/>
+        </p:spPr>
+        <p:txBody>
+          <a:bodyPr wrap="square" lIns="0" tIns="0" rIns="0" bIns="0" rtlCol="0" anchor="ctr"/>
+          <a:lstStyle/>
+          <a:p>
+            <a:pPr marL="0" indent="0" algn="ctr">
+              <a:buNone/>
+            </a:pPr>
+            <a:r>
+              <a:rPr lang="en-US" sz="900" i="1" dirty="0">
                 <a:solidFill>
                   <a:srgbClr val="94A3B8"/>
                 </a:solidFill>
               </a:rPr>
-              <a:t>bash — demo-repo</a:t>
+              <a:t>reckon.explain called via MCP · IR-117 decision trail surfaced in real time · payments/retry.py:27-28</a:t>
             </a:r>
             <a:endParaRPr lang="en-US" sz="900" dirty="0"/>
           </a:p>
         </p:txBody>
       </p:sp>
-      <p:sp>
-        <p:nvSpPr>
-          <p:cNvPr id="11" name="Shape 9"/>
-          <p:cNvSpPr/>
-          <p:nvPr/>
-        </p:nvSpPr>
-        <p:spPr>
-          <a:xfrm>
-            <a:off x="457200" y="1691640"/>
-            <a:ext cx="8229600" cy="2926080"/>
-          </a:xfrm>
-          <a:prstGeom prst="rect">
-            <a:avLst/>
-          </a:prstGeom>
-          <a:solidFill>
-            <a:srgbClr val="0A0C14"/>
-          </a:solidFill>
-          <a:ln/>
-        </p:spPr>
-      </p:sp>
-      <p:sp>
-        <p:nvSpPr>
-          <p:cNvPr id="12" name="Text 10"/>
-          <p:cNvSpPr/>
-          <p:nvPr/>
-        </p:nvSpPr>
-        <p:spPr>
-          <a:xfrm>
-            <a:off x="640080" y="1755648"/>
-            <a:ext cx="7863840" cy="256032"/>
-          </a:xfrm>
-          <a:prstGeom prst="rect">
-            <a:avLst/>
-          </a:prstGeom>
-          <a:noFill/>
-          <a:ln/>
-        </p:spPr>
-        <p:txBody>
-          <a:bodyPr wrap="square" lIns="0" tIns="0" rIns="0" bIns="0" rtlCol="0" anchor="ctr"/>
-          <a:lstStyle/>
-          <a:p>
-            <a:pPr indent="0" marL="0">
-              <a:buNone/>
-            </a:pPr>
-            <a:r>
-              <a:rPr lang="en-US" sz="1050" dirty="0">
-                <a:solidFill>
-                  <a:srgbClr val="F1F5F9"/>
-                </a:solidFill>
-                <a:latin typeface="Consolas" pitchFamily="34" charset="0"/>
-                <a:ea typeface="Consolas" pitchFamily="34" charset="-122"/>
-                <a:cs typeface="Consolas" pitchFamily="34" charset="-120"/>
-              </a:rPr>
-              <a:t>$ reckon-seed --out demo-repo --force &amp;&amp; cd demo-repo</a:t>
-            </a:r>
-            <a:endParaRPr lang="en-US" sz="1050" dirty="0"/>
-          </a:p>
-        </p:txBody>
-      </p:sp>
-      <p:sp>
-        <p:nvSpPr>
-          <p:cNvPr id="13" name="Text 11"/>
-          <p:cNvSpPr/>
-          <p:nvPr/>
-        </p:nvSpPr>
-        <p:spPr>
-          <a:xfrm>
-            <a:off x="640080" y="2002536"/>
-            <a:ext cx="7863840" cy="256032"/>
-          </a:xfrm>
-          <a:prstGeom prst="rect">
-            <a:avLst/>
-          </a:prstGeom>
-          <a:noFill/>
-          <a:ln/>
-        </p:spPr>
-        <p:txBody>
-          <a:bodyPr wrap="square" lIns="0" tIns="0" rIns="0" bIns="0" rtlCol="0" anchor="ctr"/>
-          <a:lstStyle/>
-          <a:p>
-            <a:pPr indent="0" marL="0">
-              <a:buNone/>
-            </a:pPr>
-            <a:r>
-              <a:rPr lang="en-US" sz="1050" dirty="0">
-                <a:solidFill>
-                  <a:srgbClr val="94A3B8"/>
-                </a:solidFill>
-                <a:latin typeface="Consolas" pitchFamily="34" charset="0"/>
-                <a:ea typeface="Consolas" pitchFamily="34" charset="-122"/>
-                <a:cs typeface="Consolas" pitchFamily="34" charset="-120"/>
-              </a:rPr>
-              <a:t>✔  seeded 47 commits · 3 PRs · 2 postmortems (IR-091, IR-117)</a:t>
-            </a:r>
-            <a:endParaRPr lang="en-US" sz="1050" dirty="0"/>
-          </a:p>
-        </p:txBody>
-      </p:sp>
-      <p:sp>
-        <p:nvSpPr>
-          <p:cNvPr id="14" name="Text 12"/>
-          <p:cNvSpPr/>
-          <p:nvPr/>
-        </p:nvSpPr>
-        <p:spPr>
-          <a:xfrm>
-            <a:off x="640080" y="2249424"/>
-            <a:ext cx="7863840" cy="256032"/>
-          </a:xfrm>
-          <a:prstGeom prst="rect">
-            <a:avLst/>
-          </a:prstGeom>
-          <a:noFill/>
-          <a:ln/>
-        </p:spPr>
-        <p:txBody>
-          <a:bodyPr wrap="square" lIns="0" tIns="0" rIns="0" bIns="0" rtlCol="0" anchor="ctr"/>
-          <a:lstStyle/>
-          <a:p>
-            <a:pPr indent="0" marL="0">
-              <a:buNone/>
-            </a:pPr>
-            <a:endParaRPr lang="en-US" sz="1050" dirty="0"/>
-          </a:p>
-        </p:txBody>
-      </p:sp>
-      <p:sp>
-        <p:nvSpPr>
-          <p:cNvPr id="15" name="Text 13"/>
-          <p:cNvSpPr/>
-          <p:nvPr/>
-        </p:nvSpPr>
-        <p:spPr>
-          <a:xfrm>
-            <a:off x="640080" y="2496312"/>
-            <a:ext cx="7863840" cy="256032"/>
-          </a:xfrm>
-          <a:prstGeom prst="rect">
-            <a:avLst/>
-          </a:prstGeom>
-          <a:noFill/>
-          <a:ln/>
-        </p:spPr>
-        <p:txBody>
-          <a:bodyPr wrap="square" lIns="0" tIns="0" rIns="0" bIns="0" rtlCol="0" anchor="ctr"/>
-          <a:lstStyle/>
-          <a:p>
-            <a:pPr indent="0" marL="0">
-              <a:buNone/>
-            </a:pPr>
-            <a:r>
-              <a:rPr lang="en-US" sz="1050" dirty="0">
-                <a:solidFill>
-                  <a:srgbClr val="F1F5F9"/>
-                </a:solidFill>
-                <a:latin typeface="Consolas" pitchFamily="34" charset="0"/>
-                <a:ea typeface="Consolas" pitchFamily="34" charset="-122"/>
-                <a:cs typeface="Consolas" pitchFamily="34" charset="-120"/>
-              </a:rPr>
-              <a:t>$ reckon memoir payments/retry.py</a:t>
-            </a:r>
-            <a:endParaRPr lang="en-US" sz="1050" dirty="0"/>
-          </a:p>
-        </p:txBody>
-      </p:sp>
-      <p:sp>
-        <p:nvSpPr>
-          <p:cNvPr id="16" name="Text 14"/>
-          <p:cNvSpPr/>
-          <p:nvPr/>
-        </p:nvSpPr>
-        <p:spPr>
-          <a:xfrm>
-            <a:off x="640080" y="2743200"/>
-            <a:ext cx="7863840" cy="256032"/>
-          </a:xfrm>
-          <a:prstGeom prst="rect">
-            <a:avLst/>
-          </a:prstGeom>
-          <a:noFill/>
-          <a:ln/>
-        </p:spPr>
-        <p:txBody>
-          <a:bodyPr wrap="square" lIns="0" tIns="0" rIns="0" bIns="0" rtlCol="0" anchor="ctr"/>
-          <a:lstStyle/>
-          <a:p>
-            <a:pPr indent="0" marL="0">
-              <a:buNone/>
-            </a:pPr>
-            <a:r>
-              <a:rPr lang="en-US" sz="1050" dirty="0">
-                <a:solidFill>
-                  <a:srgbClr val="10B981"/>
-                </a:solidFill>
-                <a:latin typeface="Consolas" pitchFamily="34" charset="0"/>
-                <a:ea typeface="Consolas" pitchFamily="34" charset="-122"/>
-                <a:cs typeface="Consolas" pitchFamily="34" charset="-120"/>
-              </a:rPr>
-              <a:t>✔  MEMOIR.md written  (2 tripwires, evidence_tier: strong)</a:t>
-            </a:r>
-            <a:endParaRPr lang="en-US" sz="1050" dirty="0"/>
-          </a:p>
-        </p:txBody>
-      </p:sp>
-      <p:sp>
-        <p:nvSpPr>
-          <p:cNvPr id="17" name="Text 15"/>
-          <p:cNvSpPr/>
-          <p:nvPr/>
-        </p:nvSpPr>
-        <p:spPr>
-          <a:xfrm>
-            <a:off x="640080" y="2990088"/>
-            <a:ext cx="7863840" cy="256032"/>
-          </a:xfrm>
-          <a:prstGeom prst="rect">
-            <a:avLst/>
-          </a:prstGeom>
-          <a:noFill/>
-          <a:ln/>
-        </p:spPr>
-        <p:txBody>
-          <a:bodyPr wrap="square" lIns="0" tIns="0" rIns="0" bIns="0" rtlCol="0" anchor="ctr"/>
-          <a:lstStyle/>
-          <a:p>
-            <a:pPr indent="0" marL="0">
-              <a:buNone/>
-            </a:pPr>
-            <a:endParaRPr lang="en-US" sz="1050" dirty="0"/>
-          </a:p>
-        </p:txBody>
-      </p:sp>
-      <p:sp>
-        <p:nvSpPr>
-          <p:cNvPr id="18" name="Text 16"/>
-          <p:cNvSpPr/>
-          <p:nvPr/>
-        </p:nvSpPr>
-        <p:spPr>
-          <a:xfrm>
-            <a:off x="640080" y="3236976"/>
-            <a:ext cx="7863840" cy="256032"/>
-          </a:xfrm>
-          <a:prstGeom prst="rect">
-            <a:avLst/>
-          </a:prstGeom>
-          <a:noFill/>
-          <a:ln/>
-        </p:spPr>
-        <p:txBody>
-          <a:bodyPr wrap="square" lIns="0" tIns="0" rIns="0" bIns="0" rtlCol="0" anchor="ctr"/>
-          <a:lstStyle/>
-          <a:p>
-            <a:pPr indent="0" marL="0">
-              <a:buNone/>
-            </a:pPr>
-            <a:r>
-              <a:rPr lang="en-US" sz="1050" dirty="0">
-                <a:solidFill>
-                  <a:srgbClr val="F1F5F9"/>
-                </a:solidFill>
-                <a:latin typeface="Consolas" pitchFamily="34" charset="0"/>
-                <a:ea typeface="Consolas" pitchFamily="34" charset="-122"/>
-                <a:cs typeface="Consolas" pitchFamily="34" charset="-120"/>
-              </a:rPr>
-              <a:t>$ reckon check --diff demo-diff.patch</a:t>
-            </a:r>
-            <a:endParaRPr lang="en-US" sz="1050" dirty="0"/>
-          </a:p>
-        </p:txBody>
-      </p:sp>
-      <p:sp>
-        <p:nvSpPr>
-          <p:cNvPr id="19" name="Text 17"/>
-          <p:cNvSpPr/>
-          <p:nvPr/>
-        </p:nvSpPr>
-        <p:spPr>
-          <a:xfrm>
-            <a:off x="640080" y="3483864"/>
-            <a:ext cx="7863840" cy="256032"/>
-          </a:xfrm>
-          <a:prstGeom prst="rect">
-            <a:avLst/>
-          </a:prstGeom>
-          <a:noFill/>
-          <a:ln/>
-        </p:spPr>
-        <p:txBody>
-          <a:bodyPr wrap="square" lIns="0" tIns="0" rIns="0" bIns="0" rtlCol="0" anchor="ctr"/>
-          <a:lstStyle/>
-          <a:p>
-            <a:pPr indent="0" marL="0">
-              <a:buNone/>
-            </a:pPr>
-            <a:r>
-              <a:rPr lang="en-US" sz="1050" dirty="0">
-                <a:solidFill>
-                  <a:srgbClr val="F59E0B"/>
-                </a:solidFill>
-                <a:latin typeface="Consolas" pitchFamily="34" charset="0"/>
-                <a:ea typeface="Consolas" pitchFamily="34" charset="-122"/>
-                <a:cs typeface="Consolas" pitchFamily="34" charset="-120"/>
-              </a:rPr>
-              <a:t>⚠  TRIPWIRE HIT — TW-001  payments/retry.py:27-28</a:t>
-            </a:r>
-            <a:endParaRPr lang="en-US" sz="1050" dirty="0"/>
-          </a:p>
-        </p:txBody>
-      </p:sp>
-      <p:sp>
-        <p:nvSpPr>
-          <p:cNvPr id="20" name="Text 18"/>
-          <p:cNvSpPr/>
-          <p:nvPr/>
-        </p:nvSpPr>
-        <p:spPr>
-          <a:xfrm>
-            <a:off x="640080" y="3730752"/>
-            <a:ext cx="7863840" cy="256032"/>
-          </a:xfrm>
-          <a:prstGeom prst="rect">
-            <a:avLst/>
-          </a:prstGeom>
-          <a:noFill/>
-          <a:ln/>
-        </p:spPr>
-        <p:txBody>
-          <a:bodyPr wrap="square" lIns="0" tIns="0" rIns="0" bIns="0" rtlCol="0" anchor="ctr"/>
-          <a:lstStyle/>
-          <a:p>
-            <a:pPr indent="0" marL="0">
-              <a:buNone/>
-            </a:pPr>
-            <a:r>
-              <a:rPr lang="en-US" sz="1050" dirty="0">
-                <a:solidFill>
-                  <a:srgbClr val="F59E0B"/>
-                </a:solidFill>
-                <a:latin typeface="Consolas" pitchFamily="34" charset="0"/>
-                <a:ea typeface="Consolas" pitchFamily="34" charset="-122"/>
-                <a:cs typeface="Consolas" pitchFamily="34" charset="-120"/>
-              </a:rPr>
-              <a:t>   Incident: IR-117 · Double charges during a network partition</a:t>
-            </a:r>
-            <a:endParaRPr lang="en-US" sz="1050" dirty="0"/>
-          </a:p>
-        </p:txBody>
-      </p:sp>
-      <p:sp>
-        <p:nvSpPr>
-          <p:cNvPr id="21" name="Text 19"/>
-          <p:cNvSpPr/>
-          <p:nvPr/>
-        </p:nvSpPr>
-        <p:spPr>
-          <a:xfrm>
-            <a:off x="640080" y="3977640"/>
-            <a:ext cx="7863840" cy="256032"/>
-          </a:xfrm>
-          <a:prstGeom prst="rect">
-            <a:avLst/>
-          </a:prstGeom>
-          <a:noFill/>
-          <a:ln/>
-        </p:spPr>
-        <p:txBody>
-          <a:bodyPr wrap="square" lIns="0" tIns="0" rIns="0" bIns="0" rtlCol="0" anchor="ctr"/>
-          <a:lstStyle/>
-          <a:p>
-            <a:pPr indent="0" marL="0">
-              <a:buNone/>
-            </a:pPr>
-            <a:r>
-              <a:rPr lang="en-US" sz="1050" dirty="0">
-                <a:solidFill>
-                  <a:srgbClr val="94A3B8"/>
-                </a:solidFill>
-                <a:latin typeface="Consolas" pitchFamily="34" charset="0"/>
-                <a:ea typeface="Consolas" pitchFamily="34" charset="-122"/>
-                <a:cs typeface="Consolas" pitchFamily="34" charset="-120"/>
-              </a:rPr>
-              <a:t>   Guarding test: test_idempotency_key_is_deterministic_per_attempt</a:t>
-            </a:r>
-            <a:endParaRPr lang="en-US" sz="1050" dirty="0"/>
-          </a:p>
-        </p:txBody>
-      </p:sp>
-      <p:sp>
-        <p:nvSpPr>
-          <p:cNvPr id="22" name="Text 20"/>
-          <p:cNvSpPr/>
-          <p:nvPr/>
-        </p:nvSpPr>
-        <p:spPr>
-          <a:xfrm>
-            <a:off x="640080" y="4224528"/>
-            <a:ext cx="7863840" cy="256032"/>
-          </a:xfrm>
-          <a:prstGeom prst="rect">
-            <a:avLst/>
-          </a:prstGeom>
-          <a:noFill/>
-          <a:ln/>
-        </p:spPr>
-        <p:txBody>
-          <a:bodyPr wrap="square" lIns="0" tIns="0" rIns="0" bIns="0" rtlCol="0" anchor="ctr"/>
-          <a:lstStyle/>
-          <a:p>
-            <a:pPr indent="0" marL="0">
-              <a:buNone/>
-            </a:pPr>
-            <a:r>
-              <a:rPr lang="en-US" sz="1050" dirty="0">
-                <a:solidFill>
-                  <a:srgbClr val="94A3B8"/>
-                </a:solidFill>
-                <a:latin typeface="Consolas" pitchFamily="34" charset="0"/>
-                <a:ea typeface="Consolas" pitchFamily="34" charset="-122"/>
-                <a:cs typeface="Consolas" pitchFamily="34" charset="-120"/>
-              </a:rPr>
-              <a:t>   Removing the persisted idempotency key re-opens IR-117.</a:t>
-            </a:r>
-            <a:endParaRPr lang="en-US" sz="1050" dirty="0"/>
-          </a:p>
-        </p:txBody>
-      </p:sp>
+      <p:pic>
+        <p:nvPicPr>
+          <p:cNvPr id="10" name="Picture 9">
+            <a:extLst>
+              <a:ext uri="{FF2B5EF4-FFF2-40B4-BE49-F238E27FC236}">
+                <a16:creationId xmlns:a16="http://schemas.microsoft.com/office/drawing/2014/main" id="{A162CA2C-4733-850A-AC63-79DE2F5E8C5A}"/>
+              </a:ext>
+            </a:extLst>
+          </p:cNvPr>
+          <p:cNvPicPr>
+            <a:picLocks noChangeAspect="1"/>
+          </p:cNvPicPr>
+          <p:nvPr/>
+        </p:nvPicPr>
+        <p:blipFill>
+          <a:blip r:embed="rId3"/>
+          <a:stretch>
+            <a:fillRect/>
+          </a:stretch>
+        </p:blipFill>
+        <p:spPr>
+          <a:xfrm>
+            <a:off x="457200" y="1167935"/>
+            <a:ext cx="5627077" cy="3358661"/>
+          </a:xfrm>
+          <a:prstGeom prst="rect">
+            <a:avLst/>
+          </a:prstGeom>
+        </p:spPr>
+      </p:pic>
     </p:spTree>
   </p:cSld>
   <p:clrMapOvr>
@@ -8372,6 +8470,7 @@
         <a:solidFill>
           <a:srgbClr val="0F1A2E"/>
         </a:solidFill>
+        <a:effectLst/>
       </p:bgPr>
     </p:bg>
     <p:spTree>
@@ -8407,6 +8506,13 @@
           </a:solidFill>
           <a:ln/>
         </p:spPr>
+        <p:txBody>
+          <a:bodyPr/>
+          <a:lstStyle/>
+          <a:p>
+            <a:endParaRPr lang="en-US"/>
+          </a:p>
+        </p:txBody>
       </p:sp>
       <p:sp>
         <p:nvSpPr>
@@ -8429,11 +8535,11 @@
           <a:bodyPr wrap="square" lIns="0" tIns="0" rIns="0" bIns="0" rtlCol="0" anchor="ctr"/>
           <a:lstStyle/>
           <a:p>
-            <a:pPr algn="ctr" indent="0" marL="0">
-              <a:buNone/>
-            </a:pPr>
-            <a:r>
-              <a:rPr lang="en-US" sz="800" b="1" spc="200" kern="0" dirty="0">
+            <a:pPr marL="0" indent="0" algn="ctr">
+              <a:buNone/>
+            </a:pPr>
+            <a:r>
+              <a:rPr lang="en-US" sz="800" b="1" kern="0" spc="200" dirty="0">
                 <a:solidFill>
                   <a:srgbClr val="F1F5F9"/>
                 </a:solidFill>
@@ -8465,6 +8571,13 @@
           </a:solidFill>
           <a:ln/>
         </p:spPr>
+        <p:txBody>
+          <a:bodyPr/>
+          <a:lstStyle/>
+          <a:p>
+            <a:endParaRPr lang="en-US"/>
+          </a:p>
+        </p:txBody>
       </p:sp>
       <p:sp>
         <p:nvSpPr>
@@ -8487,7 +8600,7 @@
           <a:bodyPr wrap="square" lIns="0" tIns="0" rIns="0" bIns="0" rtlCol="0" anchor="ctr"/>
           <a:lstStyle/>
           <a:p>
-            <a:pPr indent="0" marL="0">
+            <a:pPr marL="0" indent="0">
               <a:buNone/>
             </a:pPr>
             <a:r>
@@ -8524,13 +8637,20 @@
           </a:solidFill>
           <a:ln/>
           <a:effectLst>
-            <a:outerShdw sx="100000" sy="100000" kx="0" ky="0" algn="bl" rotWithShape="0" blurRad="127000" dist="38100" dir="8100000">
+            <a:outerShdw blurRad="127000" dist="38100" dir="8100000" algn="bl" rotWithShape="0">
               <a:srgbClr val="000000">
                 <a:alpha val="30000"/>
               </a:srgbClr>
             </a:outerShdw>
           </a:effectLst>
         </p:spPr>
+        <p:txBody>
+          <a:bodyPr/>
+          <a:lstStyle/>
+          <a:p>
+            <a:endParaRPr lang="en-US"/>
+          </a:p>
+        </p:txBody>
       </p:sp>
       <p:sp>
         <p:nvSpPr>
@@ -8551,6 +8671,13 @@
           </a:solidFill>
           <a:ln/>
         </p:spPr>
+        <p:txBody>
+          <a:bodyPr/>
+          <a:lstStyle/>
+          <a:p>
+            <a:endParaRPr lang="en-US"/>
+          </a:p>
+        </p:txBody>
       </p:sp>
       <p:sp>
         <p:nvSpPr>
@@ -8573,7 +8700,7 @@
           <a:bodyPr wrap="square" lIns="0" tIns="0" rIns="0" bIns="0" rtlCol="0" anchor="ctr"/>
           <a:lstStyle/>
           <a:p>
-            <a:pPr indent="0" marL="0">
+            <a:pPr marL="0" indent="0">
               <a:buNone/>
             </a:pPr>
             <a:r>
@@ -8612,7 +8739,7 @@
           <a:bodyPr wrap="square" lIns="0" tIns="0" rIns="0" bIns="0" rtlCol="0" anchor="ctr"/>
           <a:lstStyle/>
           <a:p>
-            <a:pPr indent="0" marL="0">
+            <a:pPr marL="0" indent="0">
               <a:buNone/>
             </a:pPr>
             <a:r>
@@ -8646,13 +8773,20 @@
           </a:solidFill>
           <a:ln/>
           <a:effectLst>
-            <a:outerShdw sx="100000" sy="100000" kx="0" ky="0" algn="bl" rotWithShape="0" blurRad="127000" dist="38100" dir="8100000">
+            <a:outerShdw blurRad="127000" dist="38100" dir="8100000" algn="bl" rotWithShape="0">
               <a:srgbClr val="000000">
                 <a:alpha val="30000"/>
               </a:srgbClr>
             </a:outerShdw>
           </a:effectLst>
         </p:spPr>
+        <p:txBody>
+          <a:bodyPr/>
+          <a:lstStyle/>
+          <a:p>
+            <a:endParaRPr lang="en-US"/>
+          </a:p>
+        </p:txBody>
       </p:sp>
       <p:sp>
         <p:nvSpPr>
@@ -8673,6 +8807,13 @@
           </a:solidFill>
           <a:ln/>
         </p:spPr>
+        <p:txBody>
+          <a:bodyPr/>
+          <a:lstStyle/>
+          <a:p>
+            <a:endParaRPr lang="en-US"/>
+          </a:p>
+        </p:txBody>
       </p:sp>
       <p:sp>
         <p:nvSpPr>
@@ -8695,7 +8836,7 @@
           <a:bodyPr wrap="square" lIns="0" tIns="0" rIns="0" bIns="0" rtlCol="0" anchor="ctr"/>
           <a:lstStyle/>
           <a:p>
-            <a:pPr indent="0" marL="0">
+            <a:pPr marL="0" indent="0">
               <a:buNone/>
             </a:pPr>
             <a:r>
@@ -8734,7 +8875,7 @@
           <a:bodyPr wrap="square" lIns="0" tIns="0" rIns="0" bIns="0" rtlCol="0" anchor="ctr"/>
           <a:lstStyle/>
           <a:p>
-            <a:pPr indent="0" marL="0">
+            <a:pPr marL="0" indent="0">
               <a:buNone/>
             </a:pPr>
             <a:r>
@@ -8768,13 +8909,20 @@
           </a:solidFill>
           <a:ln/>
           <a:effectLst>
-            <a:outerShdw sx="100000" sy="100000" kx="0" ky="0" algn="bl" rotWithShape="0" blurRad="127000" dist="38100" dir="8100000">
+            <a:outerShdw blurRad="127000" dist="38100" dir="8100000" algn="bl" rotWithShape="0">
               <a:srgbClr val="000000">
                 <a:alpha val="30000"/>
               </a:srgbClr>
             </a:outerShdw>
           </a:effectLst>
         </p:spPr>
+        <p:txBody>
+          <a:bodyPr/>
+          <a:lstStyle/>
+          <a:p>
+            <a:endParaRPr lang="en-US"/>
+          </a:p>
+        </p:txBody>
       </p:sp>
       <p:sp>
         <p:nvSpPr>
@@ -8795,6 +8943,13 @@
           </a:solidFill>
           <a:ln/>
         </p:spPr>
+        <p:txBody>
+          <a:bodyPr/>
+          <a:lstStyle/>
+          <a:p>
+            <a:endParaRPr lang="en-US"/>
+          </a:p>
+        </p:txBody>
       </p:sp>
       <p:sp>
         <p:nvSpPr>
@@ -8817,7 +8972,7 @@
           <a:bodyPr wrap="square" lIns="0" tIns="0" rIns="0" bIns="0" rtlCol="0" anchor="ctr"/>
           <a:lstStyle/>
           <a:p>
-            <a:pPr indent="0" marL="0">
+            <a:pPr marL="0" indent="0">
               <a:buNone/>
             </a:pPr>
             <a:r>
@@ -8856,7 +9011,7 @@
           <a:bodyPr wrap="square" lIns="0" tIns="0" rIns="0" bIns="0" rtlCol="0" anchor="ctr"/>
           <a:lstStyle/>
           <a:p>
-            <a:pPr indent="0" marL="0">
+            <a:pPr marL="0" indent="0">
               <a:buNone/>
             </a:pPr>
             <a:r>
@@ -8890,13 +9045,20 @@
           </a:solidFill>
           <a:ln/>
           <a:effectLst>
-            <a:outerShdw sx="100000" sy="100000" kx="0" ky="0" algn="bl" rotWithShape="0" blurRad="127000" dist="38100" dir="8100000">
+            <a:outerShdw blurRad="127000" dist="38100" dir="8100000" algn="bl" rotWithShape="0">
               <a:srgbClr val="000000">
                 <a:alpha val="30000"/>
               </a:srgbClr>
             </a:outerShdw>
           </a:effectLst>
         </p:spPr>
+        <p:txBody>
+          <a:bodyPr/>
+          <a:lstStyle/>
+          <a:p>
+            <a:endParaRPr lang="en-US"/>
+          </a:p>
+        </p:txBody>
       </p:sp>
       <p:sp>
         <p:nvSpPr>
@@ -8917,6 +9079,13 @@
           </a:solidFill>
           <a:ln/>
         </p:spPr>
+        <p:txBody>
+          <a:bodyPr/>
+          <a:lstStyle/>
+          <a:p>
+            <a:endParaRPr lang="en-US"/>
+          </a:p>
+        </p:txBody>
       </p:sp>
       <p:sp>
         <p:nvSpPr>
@@ -8939,7 +9108,7 @@
           <a:bodyPr wrap="square" lIns="0" tIns="0" rIns="0" bIns="0" rtlCol="0" anchor="ctr"/>
           <a:lstStyle/>
           <a:p>
-            <a:pPr indent="0" marL="0">
+            <a:pPr marL="0" indent="0">
               <a:buNone/>
             </a:pPr>
             <a:r>
@@ -8978,7 +9147,7 @@
           <a:bodyPr wrap="square" lIns="0" tIns="0" rIns="0" bIns="0" rtlCol="0" anchor="ctr"/>
           <a:lstStyle/>
           <a:p>
-            <a:pPr indent="0" marL="0">
+            <a:pPr marL="0" indent="0">
               <a:buNone/>
             </a:pPr>
             <a:r>
@@ -9012,13 +9181,20 @@
           </a:solidFill>
           <a:ln/>
           <a:effectLst>
-            <a:outerShdw sx="100000" sy="100000" kx="0" ky="0" algn="bl" rotWithShape="0" blurRad="127000" dist="38100" dir="8100000">
+            <a:outerShdw blurRad="127000" dist="38100" dir="8100000" algn="bl" rotWithShape="0">
               <a:srgbClr val="000000">
                 <a:alpha val="30000"/>
               </a:srgbClr>
             </a:outerShdw>
           </a:effectLst>
         </p:spPr>
+        <p:txBody>
+          <a:bodyPr/>
+          <a:lstStyle/>
+          <a:p>
+            <a:endParaRPr lang="en-US"/>
+          </a:p>
+        </p:txBody>
       </p:sp>
       <p:sp>
         <p:nvSpPr>
@@ -9039,6 +9215,13 @@
           </a:solidFill>
           <a:ln/>
         </p:spPr>
+        <p:txBody>
+          <a:bodyPr/>
+          <a:lstStyle/>
+          <a:p>
+            <a:endParaRPr lang="en-US"/>
+          </a:p>
+        </p:txBody>
       </p:sp>
       <p:sp>
         <p:nvSpPr>
@@ -9061,7 +9244,7 @@
           <a:bodyPr wrap="square" lIns="0" tIns="0" rIns="0" bIns="0" rtlCol="0" anchor="ctr"/>
           <a:lstStyle/>
           <a:p>
-            <a:pPr indent="0" marL="0">
+            <a:pPr marL="0" indent="0">
               <a:buNone/>
             </a:pPr>
             <a:r>
@@ -9100,7 +9283,7 @@
           <a:bodyPr wrap="square" lIns="0" tIns="0" rIns="0" bIns="0" rtlCol="0" anchor="ctr"/>
           <a:lstStyle/>
           <a:p>
-            <a:pPr indent="0" marL="0">
+            <a:pPr marL="0" indent="0">
               <a:buNone/>
             </a:pPr>
             <a:r>
@@ -9134,13 +9317,20 @@
           </a:solidFill>
           <a:ln/>
           <a:effectLst>
-            <a:outerShdw sx="100000" sy="100000" kx="0" ky="0" algn="bl" rotWithShape="0" blurRad="127000" dist="38100" dir="8100000">
+            <a:outerShdw blurRad="127000" dist="38100" dir="8100000" algn="bl" rotWithShape="0">
               <a:srgbClr val="000000">
                 <a:alpha val="30000"/>
               </a:srgbClr>
             </a:outerShdw>
           </a:effectLst>
         </p:spPr>
+        <p:txBody>
+          <a:bodyPr/>
+          <a:lstStyle/>
+          <a:p>
+            <a:endParaRPr lang="en-US"/>
+          </a:p>
+        </p:txBody>
       </p:sp>
       <p:sp>
         <p:nvSpPr>
@@ -9161,6 +9351,13 @@
           </a:solidFill>
           <a:ln/>
         </p:spPr>
+        <p:txBody>
+          <a:bodyPr/>
+          <a:lstStyle/>
+          <a:p>
+            <a:endParaRPr lang="en-US"/>
+          </a:p>
+        </p:txBody>
       </p:sp>
       <p:sp>
         <p:nvSpPr>
@@ -9183,7 +9380,7 @@
           <a:bodyPr wrap="square" lIns="0" tIns="0" rIns="0" bIns="0" rtlCol="0" anchor="ctr"/>
           <a:lstStyle/>
           <a:p>
-            <a:pPr indent="0" marL="0">
+            <a:pPr marL="0" indent="0">
               <a:buNone/>
             </a:pPr>
             <a:r>
@@ -9222,7 +9419,7 @@
           <a:bodyPr wrap="square" lIns="0" tIns="0" rIns="0" bIns="0" rtlCol="0" anchor="ctr"/>
           <a:lstStyle/>
           <a:p>
-            <a:pPr indent="0" marL="0">
+            <a:pPr marL="0" indent="0">
               <a:buNone/>
             </a:pPr>
             <a:r>
@@ -9253,6 +9450,7 @@
         <a:solidFill>
           <a:srgbClr val="080C1A"/>
         </a:solidFill>
+        <a:effectLst/>
       </p:bgPr>
     </p:bg>
     <p:spTree>
@@ -9288,6 +9486,13 @@
           </a:solidFill>
           <a:ln/>
         </p:spPr>
+        <p:txBody>
+          <a:bodyPr/>
+          <a:lstStyle/>
+          <a:p>
+            <a:endParaRPr lang="en-US"/>
+          </a:p>
+        </p:txBody>
       </p:sp>
       <p:sp>
         <p:nvSpPr>
@@ -9310,11 +9515,11 @@
           <a:bodyPr wrap="square" lIns="0" tIns="0" rIns="0" bIns="0" rtlCol="0" anchor="ctr"/>
           <a:lstStyle/>
           <a:p>
-            <a:pPr algn="ctr" indent="0" marL="0">
-              <a:buNone/>
-            </a:pPr>
-            <a:r>
-              <a:rPr lang="en-US" sz="800" b="1" spc="200" kern="0" dirty="0">
+            <a:pPr marL="0" indent="0" algn="ctr">
+              <a:buNone/>
+            </a:pPr>
+            <a:r>
+              <a:rPr lang="en-US" sz="800" b="1" kern="0" spc="200" dirty="0">
                 <a:solidFill>
                   <a:srgbClr val="F1F5F9"/>
                 </a:solidFill>
@@ -9346,6 +9551,13 @@
           </a:solidFill>
           <a:ln/>
         </p:spPr>
+        <p:txBody>
+          <a:bodyPr/>
+          <a:lstStyle/>
+          <a:p>
+            <a:endParaRPr lang="en-US"/>
+          </a:p>
+        </p:txBody>
       </p:sp>
       <p:sp>
         <p:nvSpPr>
@@ -9368,7 +9580,7 @@
           <a:bodyPr wrap="square" lIns="0" tIns="0" rIns="0" bIns="0" rtlCol="0" anchor="ctr"/>
           <a:lstStyle/>
           <a:p>
-            <a:pPr indent="0" marL="0">
+            <a:pPr marL="0" indent="0">
               <a:buNone/>
             </a:pPr>
             <a:r>
@@ -9405,13 +9617,20 @@
           </a:solidFill>
           <a:ln/>
           <a:effectLst>
-            <a:outerShdw sx="100000" sy="100000" kx="0" ky="0" algn="bl" rotWithShape="0" blurRad="127000" dist="38100" dir="8100000">
+            <a:outerShdw blurRad="127000" dist="38100" dir="8100000" algn="bl" rotWithShape="0">
               <a:srgbClr val="000000">
                 <a:alpha val="30000"/>
               </a:srgbClr>
             </a:outerShdw>
           </a:effectLst>
         </p:spPr>
+        <p:txBody>
+          <a:bodyPr/>
+          <a:lstStyle/>
+          <a:p>
+            <a:endParaRPr lang="en-US"/>
+          </a:p>
+        </p:txBody>
       </p:sp>
       <p:sp>
         <p:nvSpPr>
@@ -9432,6 +9651,13 @@
           </a:solidFill>
           <a:ln/>
         </p:spPr>
+        <p:txBody>
+          <a:bodyPr/>
+          <a:lstStyle/>
+          <a:p>
+            <a:endParaRPr lang="en-US"/>
+          </a:p>
+        </p:txBody>
       </p:sp>
       <p:sp>
         <p:nvSpPr>
@@ -9454,11 +9680,11 @@
           <a:bodyPr wrap="square" lIns="0" tIns="0" rIns="0" bIns="0" rtlCol="0" anchor="ctr"/>
           <a:lstStyle/>
           <a:p>
-            <a:pPr algn="ctr" indent="0" marL="0">
-              <a:buNone/>
-            </a:pPr>
-            <a:r>
-              <a:rPr lang="en-US" sz="1100" b="1" spc="200" kern="0" dirty="0">
+            <a:pPr marL="0" indent="0" algn="ctr">
+              <a:buNone/>
+            </a:pPr>
+            <a:r>
+              <a:rPr lang="en-US" sz="1100" b="1" kern="0" spc="200" dirty="0">
                 <a:solidFill>
                   <a:srgbClr val="7C3AED"/>
                 </a:solidFill>
@@ -9490,7 +9716,7 @@
           <a:bodyPr wrap="square" lIns="0" tIns="0" rIns="0" bIns="0" rtlCol="0" anchor="ctr"/>
           <a:lstStyle/>
           <a:p>
-            <a:pPr algn="ctr" indent="0" marL="0">
+            <a:pPr marL="0" indent="0" algn="ctr">
               <a:buNone/>
             </a:pPr>
             <a:r>
@@ -9529,7 +9755,7 @@
           <a:bodyPr wrap="square" lIns="0" tIns="0" rIns="0" bIns="0" rtlCol="0" anchor="ctr"/>
           <a:lstStyle/>
           <a:p>
-            <a:pPr algn="ctr" indent="0" marL="0">
+            <a:pPr marL="0" indent="0" algn="ctr">
               <a:buNone/>
             </a:pPr>
             <a:r>
@@ -9543,7 +9769,7 @@
             <a:endParaRPr lang="en-US" sz="1100" dirty="0"/>
           </a:p>
           <a:p>
-            <a:pPr algn="ctr" indent="0" marL="0">
+            <a:pPr marL="0" indent="0" algn="ctr">
               <a:buNone/>
             </a:pPr>
             <a:r>
@@ -9579,7 +9805,7 @@
           <a:bodyPr wrap="square" lIns="0" tIns="0" rIns="0" bIns="0" rtlCol="0" anchor="ctr"/>
           <a:lstStyle/>
           <a:p>
-            <a:pPr algn="ctr" indent="0" marL="0">
+            <a:pPr marL="0" indent="0" algn="ctr">
               <a:buNone/>
             </a:pPr>
             <a:r>
@@ -9613,13 +9839,20 @@
           </a:solidFill>
           <a:ln/>
           <a:effectLst>
-            <a:outerShdw sx="100000" sy="100000" kx="0" ky="0" algn="bl" rotWithShape="0" blurRad="127000" dist="38100" dir="8100000">
+            <a:outerShdw blurRad="127000" dist="38100" dir="8100000" algn="bl" rotWithShape="0">
               <a:srgbClr val="000000">
                 <a:alpha val="30000"/>
               </a:srgbClr>
             </a:outerShdw>
           </a:effectLst>
         </p:spPr>
+        <p:txBody>
+          <a:bodyPr/>
+          <a:lstStyle/>
+          <a:p>
+            <a:endParaRPr lang="en-US"/>
+          </a:p>
+        </p:txBody>
       </p:sp>
       <p:sp>
         <p:nvSpPr>
@@ -9640,6 +9873,13 @@
           </a:solidFill>
           <a:ln/>
         </p:spPr>
+        <p:txBody>
+          <a:bodyPr/>
+          <a:lstStyle/>
+          <a:p>
+            <a:endParaRPr lang="en-US"/>
+          </a:p>
+        </p:txBody>
       </p:sp>
       <p:sp>
         <p:nvSpPr>
@@ -9662,11 +9902,11 @@
           <a:bodyPr wrap="square" lIns="0" tIns="0" rIns="0" bIns="0" rtlCol="0" anchor="ctr"/>
           <a:lstStyle/>
           <a:p>
-            <a:pPr algn="ctr" indent="0" marL="0">
-              <a:buNone/>
-            </a:pPr>
-            <a:r>
-              <a:rPr lang="en-US" sz="1100" b="1" spc="200" kern="0" dirty="0">
+            <a:pPr marL="0" indent="0" algn="ctr">
+              <a:buNone/>
+            </a:pPr>
+            <a:r>
+              <a:rPr lang="en-US" sz="1100" b="1" kern="0" spc="200" dirty="0">
                 <a:solidFill>
                   <a:srgbClr val="0D9488"/>
                 </a:solidFill>
@@ -9698,7 +9938,7 @@
           <a:bodyPr wrap="square" lIns="0" tIns="0" rIns="0" bIns="0" rtlCol="0" anchor="ctr"/>
           <a:lstStyle/>
           <a:p>
-            <a:pPr algn="ctr" indent="0" marL="0">
+            <a:pPr marL="0" indent="0" algn="ctr">
               <a:buNone/>
             </a:pPr>
             <a:r>
@@ -9737,7 +9977,7 @@
           <a:bodyPr wrap="square" lIns="0" tIns="0" rIns="0" bIns="0" rtlCol="0" anchor="ctr"/>
           <a:lstStyle/>
           <a:p>
-            <a:pPr algn="ctr" indent="0" marL="0">
+            <a:pPr marL="0" indent="0" algn="ctr">
               <a:buNone/>
             </a:pPr>
             <a:r>
@@ -9751,7 +9991,7 @@
             <a:endParaRPr lang="en-US" sz="1100" dirty="0"/>
           </a:p>
           <a:p>
-            <a:pPr algn="ctr" indent="0" marL="0">
+            <a:pPr marL="0" indent="0" algn="ctr">
               <a:buNone/>
             </a:pPr>
             <a:r>
@@ -9787,7 +10027,7 @@
           <a:bodyPr wrap="square" lIns="0" tIns="0" rIns="0" bIns="0" rtlCol="0" anchor="ctr"/>
           <a:lstStyle/>
           <a:p>
-            <a:pPr algn="ctr" indent="0" marL="0">
+            <a:pPr marL="0" indent="0" algn="ctr">
               <a:buNone/>
             </a:pPr>
             <a:r>
@@ -9823,7 +10063,7 @@
           <a:bodyPr wrap="square" lIns="0" tIns="0" rIns="0" bIns="0" rtlCol="0" anchor="ctr"/>
           <a:lstStyle/>
           <a:p>
-            <a:pPr algn="ctr" indent="0" marL="0">
+            <a:pPr marL="0" indent="0" algn="ctr">
               <a:buNone/>
             </a:pPr>
             <a:r>
@@ -9854,6 +10094,7 @@
         <a:solidFill>
           <a:srgbClr val="0F1A2E"/>
         </a:solidFill>
+        <a:effectLst/>
       </p:bgPr>
     </p:bg>
     <p:spTree>
@@ -9889,6 +10130,13 @@
           </a:solidFill>
           <a:ln/>
         </p:spPr>
+        <p:txBody>
+          <a:bodyPr/>
+          <a:lstStyle/>
+          <a:p>
+            <a:endParaRPr lang="en-US"/>
+          </a:p>
+        </p:txBody>
       </p:sp>
       <p:sp>
         <p:nvSpPr>
@@ -9911,11 +10159,11 @@
           <a:bodyPr wrap="square" lIns="0" tIns="0" rIns="0" bIns="0" rtlCol="0" anchor="ctr"/>
           <a:lstStyle/>
           <a:p>
-            <a:pPr algn="ctr" indent="0" marL="0">
-              <a:buNone/>
-            </a:pPr>
-            <a:r>
-              <a:rPr lang="en-US" sz="800" b="1" spc="200" kern="0" dirty="0">
+            <a:pPr marL="0" indent="0" algn="ctr">
+              <a:buNone/>
+            </a:pPr>
+            <a:r>
+              <a:rPr lang="en-US" sz="800" b="1" kern="0" spc="200" dirty="0">
                 <a:solidFill>
                   <a:srgbClr val="F1F5F9"/>
                 </a:solidFill>
@@ -9947,6 +10195,13 @@
           </a:solidFill>
           <a:ln/>
         </p:spPr>
+        <p:txBody>
+          <a:bodyPr/>
+          <a:lstStyle/>
+          <a:p>
+            <a:endParaRPr lang="en-US"/>
+          </a:p>
+        </p:txBody>
       </p:sp>
       <p:sp>
         <p:nvSpPr>
@@ -9969,7 +10224,7 @@
           <a:bodyPr wrap="square" lIns="0" tIns="0" rIns="0" bIns="0" rtlCol="0" anchor="ctr"/>
           <a:lstStyle/>
           <a:p>
-            <a:pPr indent="0" marL="0">
+            <a:pPr marL="0" indent="0">
               <a:buNone/>
             </a:pPr>
             <a:r>
@@ -10006,13 +10261,20 @@
           </a:solidFill>
           <a:ln/>
           <a:effectLst>
-            <a:outerShdw sx="100000" sy="100000" kx="0" ky="0" algn="bl" rotWithShape="0" blurRad="127000" dist="38100" dir="8100000">
+            <a:outerShdw blurRad="127000" dist="38100" dir="8100000" algn="bl" rotWithShape="0">
               <a:srgbClr val="000000">
                 <a:alpha val="30000"/>
               </a:srgbClr>
             </a:outerShdw>
           </a:effectLst>
         </p:spPr>
+        <p:txBody>
+          <a:bodyPr/>
+          <a:lstStyle/>
+          <a:p>
+            <a:endParaRPr lang="en-US"/>
+          </a:p>
+        </p:txBody>
       </p:sp>
       <p:sp>
         <p:nvSpPr>
@@ -10033,6 +10295,13 @@
           </a:solidFill>
           <a:ln/>
         </p:spPr>
+        <p:txBody>
+          <a:bodyPr/>
+          <a:lstStyle/>
+          <a:p>
+            <a:endParaRPr lang="en-US"/>
+          </a:p>
+        </p:txBody>
       </p:sp>
       <p:sp>
         <p:nvSpPr>
@@ -10055,6 +10324,13 @@
           </a:solidFill>
           <a:ln/>
         </p:spPr>
+        <p:txBody>
+          <a:bodyPr/>
+          <a:lstStyle/>
+          <a:p>
+            <a:endParaRPr lang="en-US"/>
+          </a:p>
+        </p:txBody>
       </p:sp>
       <p:sp>
         <p:nvSpPr>
@@ -10077,7 +10353,7 @@
           <a:bodyPr wrap="square" lIns="0" tIns="0" rIns="0" bIns="0" rtlCol="0" anchor="ctr"/>
           <a:lstStyle/>
           <a:p>
-            <a:pPr algn="ctr" indent="0" marL="0">
+            <a:pPr marL="0" indent="0" algn="ctr">
               <a:buNone/>
             </a:pPr>
             <a:r>
@@ -10113,7 +10389,7 @@
           <a:bodyPr wrap="square" lIns="0" tIns="0" rIns="0" bIns="0" rtlCol="0" anchor="ctr"/>
           <a:lstStyle/>
           <a:p>
-            <a:pPr indent="0" marL="0">
+            <a:pPr marL="0" indent="0">
               <a:buNone/>
             </a:pPr>
             <a:r>
@@ -10149,7 +10425,7 @@
           <a:bodyPr wrap="square" lIns="0" tIns="0" rIns="0" bIns="0" rtlCol="0" anchor="ctr"/>
           <a:lstStyle/>
           <a:p>
-            <a:pPr indent="0" marL="0">
+            <a:pPr marL="0" indent="0">
               <a:buNone/>
             </a:pPr>
             <a:r>
@@ -10183,13 +10459,20 @@
           </a:solidFill>
           <a:ln/>
           <a:effectLst>
-            <a:outerShdw sx="100000" sy="100000" kx="0" ky="0" algn="bl" rotWithShape="0" blurRad="127000" dist="38100" dir="8100000">
+            <a:outerShdw blurRad="127000" dist="38100" dir="8100000" algn="bl" rotWithShape="0">
               <a:srgbClr val="000000">
                 <a:alpha val="30000"/>
               </a:srgbClr>
             </a:outerShdw>
           </a:effectLst>
         </p:spPr>
+        <p:txBody>
+          <a:bodyPr/>
+          <a:lstStyle/>
+          <a:p>
+            <a:endParaRPr lang="en-US"/>
+          </a:p>
+        </p:txBody>
       </p:sp>
       <p:sp>
         <p:nvSpPr>
@@ -10210,6 +10493,13 @@
           </a:solidFill>
           <a:ln/>
         </p:spPr>
+        <p:txBody>
+          <a:bodyPr/>
+          <a:lstStyle/>
+          <a:p>
+            <a:endParaRPr lang="en-US"/>
+          </a:p>
+        </p:txBody>
       </p:sp>
       <p:sp>
         <p:nvSpPr>
@@ -10232,6 +10522,13 @@
           </a:solidFill>
           <a:ln/>
         </p:spPr>
+        <p:txBody>
+          <a:bodyPr/>
+          <a:lstStyle/>
+          <a:p>
+            <a:endParaRPr lang="en-US"/>
+          </a:p>
+        </p:txBody>
       </p:sp>
       <p:sp>
         <p:nvSpPr>
@@ -10254,7 +10551,7 @@
           <a:bodyPr wrap="square" lIns="0" tIns="0" rIns="0" bIns="0" rtlCol="0" anchor="ctr"/>
           <a:lstStyle/>
           <a:p>
-            <a:pPr algn="ctr" indent="0" marL="0">
+            <a:pPr marL="0" indent="0" algn="ctr">
               <a:buNone/>
             </a:pPr>
             <a:r>
@@ -10290,7 +10587,7 @@
           <a:bodyPr wrap="square" lIns="0" tIns="0" rIns="0" bIns="0" rtlCol="0" anchor="ctr"/>
           <a:lstStyle/>
           <a:p>
-            <a:pPr indent="0" marL="0">
+            <a:pPr marL="0" indent="0">
               <a:buNone/>
             </a:pPr>
             <a:r>
@@ -10326,7 +10623,7 @@
           <a:bodyPr wrap="square" lIns="0" tIns="0" rIns="0" bIns="0" rtlCol="0" anchor="ctr"/>
           <a:lstStyle/>
           <a:p>
-            <a:pPr indent="0" marL="0">
+            <a:pPr marL="0" indent="0">
               <a:buNone/>
             </a:pPr>
             <a:r>
@@ -10360,13 +10657,20 @@
           </a:solidFill>
           <a:ln/>
           <a:effectLst>
-            <a:outerShdw sx="100000" sy="100000" kx="0" ky="0" algn="bl" rotWithShape="0" blurRad="127000" dist="38100" dir="8100000">
+            <a:outerShdw blurRad="127000" dist="38100" dir="8100000" algn="bl" rotWithShape="0">
               <a:srgbClr val="000000">
                 <a:alpha val="30000"/>
               </a:srgbClr>
             </a:outerShdw>
           </a:effectLst>
         </p:spPr>
+        <p:txBody>
+          <a:bodyPr/>
+          <a:lstStyle/>
+          <a:p>
+            <a:endParaRPr lang="en-US"/>
+          </a:p>
+        </p:txBody>
       </p:sp>
       <p:sp>
         <p:nvSpPr>
@@ -10387,6 +10691,13 @@
           </a:solidFill>
           <a:ln/>
         </p:spPr>
+        <p:txBody>
+          <a:bodyPr/>
+          <a:lstStyle/>
+          <a:p>
+            <a:endParaRPr lang="en-US"/>
+          </a:p>
+        </p:txBody>
       </p:sp>
       <p:sp>
         <p:nvSpPr>
@@ -10409,6 +10720,13 @@
           </a:solidFill>
           <a:ln/>
         </p:spPr>
+        <p:txBody>
+          <a:bodyPr/>
+          <a:lstStyle/>
+          <a:p>
+            <a:endParaRPr lang="en-US"/>
+          </a:p>
+        </p:txBody>
       </p:sp>
       <p:sp>
         <p:nvSpPr>
@@ -10431,7 +10749,7 @@
           <a:bodyPr wrap="square" lIns="0" tIns="0" rIns="0" bIns="0" rtlCol="0" anchor="ctr"/>
           <a:lstStyle/>
           <a:p>
-            <a:pPr algn="ctr" indent="0" marL="0">
+            <a:pPr marL="0" indent="0" algn="ctr">
               <a:buNone/>
             </a:pPr>
             <a:r>
@@ -10467,7 +10785,7 @@
           <a:bodyPr wrap="square" lIns="0" tIns="0" rIns="0" bIns="0" rtlCol="0" anchor="ctr"/>
           <a:lstStyle/>
           <a:p>
-            <a:pPr indent="0" marL="0">
+            <a:pPr marL="0" indent="0">
               <a:buNone/>
             </a:pPr>
             <a:r>
@@ -10503,7 +10821,7 @@
           <a:bodyPr wrap="square" lIns="0" tIns="0" rIns="0" bIns="0" rtlCol="0" anchor="ctr"/>
           <a:lstStyle/>
           <a:p>
-            <a:pPr indent="0" marL="0">
+            <a:pPr marL="0" indent="0">
               <a:buNone/>
             </a:pPr>
             <a:r>
@@ -10537,13 +10855,20 @@
           </a:solidFill>
           <a:ln/>
           <a:effectLst>
-            <a:outerShdw sx="100000" sy="100000" kx="0" ky="0" algn="bl" rotWithShape="0" blurRad="127000" dist="38100" dir="8100000">
+            <a:outerShdw blurRad="127000" dist="38100" dir="8100000" algn="bl" rotWithShape="0">
               <a:srgbClr val="000000">
                 <a:alpha val="30000"/>
               </a:srgbClr>
             </a:outerShdw>
           </a:effectLst>
         </p:spPr>
+        <p:txBody>
+          <a:bodyPr/>
+          <a:lstStyle/>
+          <a:p>
+            <a:endParaRPr lang="en-US"/>
+          </a:p>
+        </p:txBody>
       </p:sp>
       <p:sp>
         <p:nvSpPr>
@@ -10564,6 +10889,13 @@
           </a:solidFill>
           <a:ln/>
         </p:spPr>
+        <p:txBody>
+          <a:bodyPr/>
+          <a:lstStyle/>
+          <a:p>
+            <a:endParaRPr lang="en-US"/>
+          </a:p>
+        </p:txBody>
       </p:sp>
       <p:sp>
         <p:nvSpPr>
@@ -10586,6 +10918,13 @@
           </a:solidFill>
           <a:ln/>
         </p:spPr>
+        <p:txBody>
+          <a:bodyPr/>
+          <a:lstStyle/>
+          <a:p>
+            <a:endParaRPr lang="en-US"/>
+          </a:p>
+        </p:txBody>
       </p:sp>
       <p:sp>
         <p:nvSpPr>
@@ -10608,7 +10947,7 @@
           <a:bodyPr wrap="square" lIns="0" tIns="0" rIns="0" bIns="0" rtlCol="0" anchor="ctr"/>
           <a:lstStyle/>
           <a:p>
-            <a:pPr algn="ctr" indent="0" marL="0">
+            <a:pPr marL="0" indent="0" algn="ctr">
               <a:buNone/>
             </a:pPr>
             <a:r>
@@ -10644,7 +10983,7 @@
           <a:bodyPr wrap="square" lIns="0" tIns="0" rIns="0" bIns="0" rtlCol="0" anchor="ctr"/>
           <a:lstStyle/>
           <a:p>
-            <a:pPr indent="0" marL="0">
+            <a:pPr marL="0" indent="0">
               <a:buNone/>
             </a:pPr>
             <a:r>
@@ -10680,7 +11019,7 @@
           <a:bodyPr wrap="square" lIns="0" tIns="0" rIns="0" bIns="0" rtlCol="0" anchor="ctr"/>
           <a:lstStyle/>
           <a:p>
-            <a:pPr indent="0" marL="0">
+            <a:pPr marL="0" indent="0">
               <a:buNone/>
             </a:pPr>
             <a:r>
@@ -10996,4 +11335,319 @@
     </a:ext>
   </a:extLst>
 </a:theme>
+</file>
+
+<file path=ppt/theme/theme2.xml><?xml version="1.0" encoding="utf-8"?>
+<a:theme xmlns:a="http://schemas.openxmlformats.org/drawingml/2006/main" name="Office Theme">
+  <a:themeElements>
+    <a:clrScheme name="Office">
+      <a:dk1>
+        <a:sysClr val="windowText" lastClr="000000"/>
+      </a:dk1>
+      <a:lt1>
+        <a:sysClr val="window" lastClr="FFFFFF"/>
+      </a:lt1>
+      <a:dk2>
+        <a:srgbClr val="0E2841"/>
+      </a:dk2>
+      <a:lt2>
+        <a:srgbClr val="E8E8E8"/>
+      </a:lt2>
+      <a:accent1>
+        <a:srgbClr val="156082"/>
+      </a:accent1>
+      <a:accent2>
+        <a:srgbClr val="E97132"/>
+      </a:accent2>
+      <a:accent3>
+        <a:srgbClr val="196B24"/>
+      </a:accent3>
+      <a:accent4>
+        <a:srgbClr val="0F9ED5"/>
+      </a:accent4>
+      <a:accent5>
+        <a:srgbClr val="A02B93"/>
+      </a:accent5>
+      <a:accent6>
+        <a:srgbClr val="4EA72E"/>
+      </a:accent6>
+      <a:hlink>
+        <a:srgbClr val="467886"/>
+      </a:hlink>
+      <a:folHlink>
+        <a:srgbClr val="96607D"/>
+      </a:folHlink>
+    </a:clrScheme>
+    <a:fontScheme name="Office">
+      <a:majorFont>
+        <a:latin typeface="Aptos Display" panose="02110004020202020204"/>
+        <a:ea typeface=""/>
+        <a:cs typeface=""/>
+        <a:font script="Jpan" typeface="游ゴシック Light"/>
+        <a:font script="Hang" typeface="맑은 고딕"/>
+        <a:font script="Hans" typeface="等线 Light"/>
+        <a:font script="Hant" typeface="新細明體"/>
+        <a:font script="Arab" typeface="Times New Roman"/>
+        <a:font script="Hebr" typeface="Times New Roman"/>
+        <a:font script="Thai" typeface="Angsana New"/>
+        <a:font script="Ethi" typeface="Nyala"/>
+        <a:font script="Beng" typeface="Vrinda"/>
+        <a:font script="Gujr" typeface="Shruti"/>
+        <a:font script="Khmr" typeface="MoolBoran"/>
+        <a:font script="Knda" typeface="Tunga"/>
+        <a:font script="Guru" typeface="Raavi"/>
+        <a:font script="Cans" typeface="Euphemia"/>
+        <a:font script="Cher" typeface="Plantagenet Cherokee"/>
+        <a:font script="Yiii" typeface="Microsoft Yi Baiti"/>
+        <a:font script="Tibt" typeface="Microsoft Himalaya"/>
+        <a:font script="Thaa" typeface="MV Boli"/>
+        <a:font script="Deva" typeface="Mangal"/>
+        <a:font script="Telu" typeface="Gautami"/>
+        <a:font script="Taml" typeface="Latha"/>
+        <a:font script="Syrc" typeface="Estrangelo Edessa"/>
+        <a:font script="Orya" typeface="Kalinga"/>
+        <a:font script="Mlym" typeface="Kartika"/>
+        <a:font script="Laoo" typeface="DokChampa"/>
+        <a:font script="Sinh" typeface="Iskoola Pota"/>
+        <a:font script="Mong" typeface="Mongolian Baiti"/>
+        <a:font script="Viet" typeface="Times New Roman"/>
+        <a:font script="Uigh" typeface="Microsoft Uighur"/>
+        <a:font script="Geor" typeface="Sylfaen"/>
+        <a:font script="Armn" typeface="Arial"/>
+        <a:font script="Bugi" typeface="Leelawadee UI"/>
+        <a:font script="Bopo" typeface="Microsoft JhengHei"/>
+        <a:font script="Java" typeface="Javanese Text"/>
+        <a:font script="Lisu" typeface="Segoe UI"/>
+        <a:font script="Mymr" typeface="Myanmar Text"/>
+        <a:font script="Nkoo" typeface="Ebrima"/>
+        <a:font script="Olck" typeface="Nirmala UI"/>
+        <a:font script="Osma" typeface="Ebrima"/>
+        <a:font script="Phag" typeface="Phagspa"/>
+        <a:font script="Syrn" typeface="Estrangelo Edessa"/>
+        <a:font script="Syrj" typeface="Estrangelo Edessa"/>
+        <a:font script="Syre" typeface="Estrangelo Edessa"/>
+        <a:font script="Sora" typeface="Nirmala UI"/>
+        <a:font script="Tale" typeface="Microsoft Tai Le"/>
+        <a:font script="Talu" typeface="Microsoft New Tai Lue"/>
+        <a:font script="Tfng" typeface="Ebrima"/>
+      </a:majorFont>
+      <a:minorFont>
+        <a:latin typeface="Aptos" panose="02110004020202020204"/>
+        <a:ea typeface=""/>
+        <a:cs typeface=""/>
+        <a:font script="Jpan" typeface="游ゴシック"/>
+        <a:font script="Hang" typeface="맑은 고딕"/>
+        <a:font script="Hans" typeface="等线"/>
+        <a:font script="Hant" typeface="新細明體"/>
+        <a:font script="Arab" typeface="Arial"/>
+        <a:font script="Hebr" typeface="Arial"/>
+        <a:font script="Thai" typeface="Cordia New"/>
+        <a:font script="Ethi" typeface="Nyala"/>
+        <a:font script="Beng" typeface="Vrinda"/>
+        <a:font script="Gujr" typeface="Shruti"/>
+        <a:font script="Khmr" typeface="DaunPenh"/>
+        <a:font script="Knda" typeface="Tunga"/>
+        <a:font script="Guru" typeface="Raavi"/>
+        <a:font script="Cans" typeface="Euphemia"/>
+        <a:font script="Cher" typeface="Plantagenet Cherokee"/>
+        <a:font script="Yiii" typeface="Microsoft Yi Baiti"/>
+        <a:font script="Tibt" typeface="Microsoft Himalaya"/>
+        <a:font script="Thaa" typeface="MV Boli"/>
+        <a:font script="Deva" typeface="Mangal"/>
+        <a:font script="Telu" typeface="Gautami"/>
+        <a:font script="Taml" typeface="Latha"/>
+        <a:font script="Syrc" typeface="Estrangelo Edessa"/>
+        <a:font script="Orya" typeface="Kalinga"/>
+        <a:font script="Mlym" typeface="Kartika"/>
+        <a:font script="Laoo" typeface="DokChampa"/>
+        <a:font script="Sinh" typeface="Iskoola Pota"/>
+        <a:font script="Mong" typeface="Mongolian Baiti"/>
+        <a:font script="Viet" typeface="Arial"/>
+        <a:font script="Uigh" typeface="Microsoft Uighur"/>
+        <a:font script="Geor" typeface="Sylfaen"/>
+        <a:font script="Armn" typeface="Arial"/>
+        <a:font script="Bugi" typeface="Leelawadee UI"/>
+        <a:font script="Bopo" typeface="Microsoft JhengHei"/>
+        <a:font script="Java" typeface="Javanese Text"/>
+        <a:font script="Lisu" typeface="Segoe UI"/>
+        <a:font script="Mymr" typeface="Myanmar Text"/>
+        <a:font script="Nkoo" typeface="Ebrima"/>
+        <a:font script="Olck" typeface="Nirmala UI"/>
+        <a:font script="Osma" typeface="Ebrima"/>
+        <a:font script="Phag" typeface="Phagspa"/>
+        <a:font script="Syrn" typeface="Estrangelo Edessa"/>
+        <a:font script="Syrj" typeface="Estrangelo Edessa"/>
+        <a:font script="Syre" typeface="Estrangelo Edessa"/>
+        <a:font script="Sora" typeface="Nirmala UI"/>
+        <a:font script="Tale" typeface="Microsoft Tai Le"/>
+        <a:font script="Talu" typeface="Microsoft New Tai Lue"/>
+        <a:font script="Tfng" typeface="Ebrima"/>
+      </a:minorFont>
+    </a:fontScheme>
+    <a:fmtScheme name="Office">
+      <a:fillStyleLst>
+        <a:solidFill>
+          <a:schemeClr val="phClr"/>
+        </a:solidFill>
+        <a:gradFill rotWithShape="1">
+          <a:gsLst>
+            <a:gs pos="0">
+              <a:schemeClr val="phClr">
+                <a:lumMod val="110000"/>
+                <a:satMod val="105000"/>
+                <a:tint val="67000"/>
+              </a:schemeClr>
+            </a:gs>
+            <a:gs pos="50000">
+              <a:schemeClr val="phClr">
+                <a:lumMod val="105000"/>
+                <a:satMod val="103000"/>
+                <a:tint val="73000"/>
+              </a:schemeClr>
+            </a:gs>
+            <a:gs pos="100000">
+              <a:schemeClr val="phClr">
+                <a:lumMod val="105000"/>
+                <a:satMod val="109000"/>
+                <a:tint val="81000"/>
+              </a:schemeClr>
+            </a:gs>
+          </a:gsLst>
+          <a:lin ang="5400000" scaled="0"/>
+        </a:gradFill>
+        <a:gradFill rotWithShape="1">
+          <a:gsLst>
+            <a:gs pos="0">
+              <a:schemeClr val="phClr">
+                <a:satMod val="103000"/>
+                <a:lumMod val="102000"/>
+                <a:tint val="94000"/>
+              </a:schemeClr>
+            </a:gs>
+            <a:gs pos="50000">
+              <a:schemeClr val="phClr">
+                <a:satMod val="110000"/>
+                <a:lumMod val="100000"/>
+                <a:shade val="100000"/>
+              </a:schemeClr>
+            </a:gs>
+            <a:gs pos="100000">
+              <a:schemeClr val="phClr">
+                <a:lumMod val="99000"/>
+                <a:satMod val="120000"/>
+                <a:shade val="78000"/>
+              </a:schemeClr>
+            </a:gs>
+          </a:gsLst>
+          <a:lin ang="5400000" scaled="0"/>
+        </a:gradFill>
+      </a:fillStyleLst>
+      <a:lnStyleLst>
+        <a:ln w="12700" cap="flat" cmpd="sng" algn="ctr">
+          <a:solidFill>
+            <a:schemeClr val="phClr"/>
+          </a:solidFill>
+          <a:prstDash val="solid"/>
+          <a:miter lim="800000"/>
+        </a:ln>
+        <a:ln w="19050" cap="flat" cmpd="sng" algn="ctr">
+          <a:solidFill>
+            <a:schemeClr val="phClr"/>
+          </a:solidFill>
+          <a:prstDash val="solid"/>
+          <a:miter lim="800000"/>
+        </a:ln>
+        <a:ln w="25400" cap="flat" cmpd="sng" algn="ctr">
+          <a:solidFill>
+            <a:schemeClr val="phClr"/>
+          </a:solidFill>
+          <a:prstDash val="solid"/>
+          <a:miter lim="800000"/>
+        </a:ln>
+      </a:lnStyleLst>
+      <a:effectStyleLst>
+        <a:effectStyle>
+          <a:effectLst/>
+        </a:effectStyle>
+        <a:effectStyle>
+          <a:effectLst/>
+        </a:effectStyle>
+        <a:effectStyle>
+          <a:effectLst>
+            <a:outerShdw blurRad="57150" dist="19050" dir="5400000" algn="ctr" rotWithShape="0">
+              <a:srgbClr val="000000">
+                <a:alpha val="63000"/>
+              </a:srgbClr>
+            </a:outerShdw>
+          </a:effectLst>
+        </a:effectStyle>
+      </a:effectStyleLst>
+      <a:bgFillStyleLst>
+        <a:solidFill>
+          <a:schemeClr val="phClr"/>
+        </a:solidFill>
+        <a:solidFill>
+          <a:schemeClr val="phClr">
+            <a:tint val="95000"/>
+            <a:satMod val="170000"/>
+          </a:schemeClr>
+        </a:solidFill>
+        <a:gradFill rotWithShape="1">
+          <a:gsLst>
+            <a:gs pos="0">
+              <a:schemeClr val="phClr">
+                <a:tint val="93000"/>
+                <a:satMod val="150000"/>
+                <a:shade val="98000"/>
+                <a:lumMod val="102000"/>
+              </a:schemeClr>
+            </a:gs>
+            <a:gs pos="50000">
+              <a:schemeClr val="phClr">
+                <a:tint val="98000"/>
+                <a:satMod val="130000"/>
+                <a:shade val="90000"/>
+                <a:lumMod val="103000"/>
+              </a:schemeClr>
+            </a:gs>
+            <a:gs pos="100000">
+              <a:schemeClr val="phClr">
+                <a:shade val="63000"/>
+                <a:satMod val="120000"/>
+              </a:schemeClr>
+            </a:gs>
+          </a:gsLst>
+          <a:lin ang="5400000" scaled="0"/>
+        </a:gradFill>
+      </a:bgFillStyleLst>
+    </a:fmtScheme>
+  </a:themeElements>
+  <a:objectDefaults>
+    <a:lnDef>
+      <a:spPr/>
+      <a:bodyPr/>
+      <a:lstStyle/>
+      <a:style>
+        <a:lnRef idx="2">
+          <a:schemeClr val="accent1"/>
+        </a:lnRef>
+        <a:fillRef idx="0">
+          <a:schemeClr val="accent1"/>
+        </a:fillRef>
+        <a:effectRef idx="1">
+          <a:schemeClr val="accent1"/>
+        </a:effectRef>
+        <a:fontRef idx="minor">
+          <a:schemeClr val="tx1"/>
+        </a:fontRef>
+      </a:style>
+    </a:lnDef>
+  </a:objectDefaults>
+  <a:extraClrSchemeLst/>
+  <a:extLst>
+    <a:ext uri="{05A4C25C-085E-4340-85A3-A5531E510DB2}">
+      <thm15:themeFamily xmlns:thm15="http://schemas.microsoft.com/office/thememl/2012/main" name="Office Theme" id="{2E142A2C-CD16-42D6-873A-C26D2A0506FA}" vid="{1BDDFF52-6CD6-40A5-AB3C-68EB2F1E4D0A}"/>
+    </a:ext>
+  </a:extLst>
+</a:theme>
 </file>